--- a/docs/pptx/entire/ritu-entire-linsubhr-disc-akikdigo.pptx
+++ b/docs/pptx/entire/ritu-entire-linsubhr-disc-akikdigo.pptx
@@ -3045,612 +3045,612 @@
           </p:nvSpPr>
           <p:spPr>
             <a:xfrm>
-              <a:off x="1172049" y="2888054"/>
-              <a:ext cx="7090630" cy="2200194"/>
+              <a:off x="1172049" y="2870245"/>
+              <a:ext cx="7090630" cy="2219522"/>
             </a:xfrm>
             <a:custGeom>
               <a:avLst/>
               <a:pathLst>
-                <a:path w="7090630" h="2200194">
+                <a:path w="7090630" h="2219522">
                   <a:moveTo>
                     <a:pt x="0" y="0"/>
                   </a:moveTo>
                   <a:lnTo>
-                    <a:pt x="71622" y="46474"/>
-                  </a:lnTo>
-                  <a:lnTo>
-                    <a:pt x="143245" y="92140"/>
-                  </a:lnTo>
-                  <a:lnTo>
-                    <a:pt x="214867" y="137011"/>
-                  </a:lnTo>
-                  <a:lnTo>
-                    <a:pt x="286490" y="181100"/>
-                  </a:lnTo>
-                  <a:lnTo>
-                    <a:pt x="358112" y="224422"/>
-                  </a:lnTo>
-                  <a:lnTo>
-                    <a:pt x="429735" y="266989"/>
-                  </a:lnTo>
-                  <a:lnTo>
-                    <a:pt x="501357" y="308815"/>
-                  </a:lnTo>
-                  <a:lnTo>
-                    <a:pt x="572980" y="349913"/>
-                  </a:lnTo>
-                  <a:lnTo>
-                    <a:pt x="644602" y="390295"/>
-                  </a:lnTo>
-                  <a:lnTo>
-                    <a:pt x="716225" y="429975"/>
-                  </a:lnTo>
-                  <a:lnTo>
-                    <a:pt x="787847" y="468963"/>
-                  </a:lnTo>
-                  <a:lnTo>
-                    <a:pt x="859470" y="507272"/>
-                  </a:lnTo>
-                  <a:lnTo>
-                    <a:pt x="931092" y="544915"/>
-                  </a:lnTo>
-                  <a:lnTo>
-                    <a:pt x="1002715" y="581902"/>
-                  </a:lnTo>
-                  <a:lnTo>
-                    <a:pt x="1074337" y="618245"/>
-                  </a:lnTo>
-                  <a:lnTo>
-                    <a:pt x="1145960" y="653955"/>
-                  </a:lnTo>
-                  <a:lnTo>
-                    <a:pt x="1217582" y="689044"/>
-                  </a:lnTo>
-                  <a:lnTo>
-                    <a:pt x="1289205" y="723521"/>
-                  </a:lnTo>
-                  <a:lnTo>
-                    <a:pt x="1360827" y="757398"/>
-                  </a:lnTo>
-                  <a:lnTo>
-                    <a:pt x="1432450" y="790686"/>
-                  </a:lnTo>
-                  <a:lnTo>
-                    <a:pt x="1504073" y="823394"/>
-                  </a:lnTo>
-                  <a:lnTo>
-                    <a:pt x="1575695" y="855532"/>
-                  </a:lnTo>
-                  <a:lnTo>
-                    <a:pt x="1647318" y="887111"/>
-                  </a:lnTo>
-                  <a:lnTo>
-                    <a:pt x="1718940" y="918139"/>
-                  </a:lnTo>
-                  <a:lnTo>
-                    <a:pt x="1790563" y="948628"/>
-                  </a:lnTo>
-                  <a:lnTo>
-                    <a:pt x="1862185" y="978586"/>
-                  </a:lnTo>
-                  <a:lnTo>
-                    <a:pt x="1933808" y="1008022"/>
-                  </a:lnTo>
-                  <a:lnTo>
-                    <a:pt x="2005430" y="1036946"/>
-                  </a:lnTo>
-                  <a:lnTo>
-                    <a:pt x="2077053" y="1065366"/>
-                  </a:lnTo>
-                  <a:lnTo>
-                    <a:pt x="2148675" y="1093291"/>
-                  </a:lnTo>
-                  <a:lnTo>
-                    <a:pt x="2220298" y="1120730"/>
-                  </a:lnTo>
-                  <a:lnTo>
-                    <a:pt x="2291920" y="1147691"/>
-                  </a:lnTo>
-                  <a:lnTo>
-                    <a:pt x="2363543" y="1174183"/>
-                  </a:lnTo>
-                  <a:lnTo>
-                    <a:pt x="2435165" y="1200213"/>
-                  </a:lnTo>
-                  <a:lnTo>
-                    <a:pt x="2506788" y="1225791"/>
-                  </a:lnTo>
-                  <a:lnTo>
-                    <a:pt x="2578410" y="1250923"/>
-                  </a:lnTo>
-                  <a:lnTo>
-                    <a:pt x="2650033" y="1275617"/>
-                  </a:lnTo>
-                  <a:lnTo>
-                    <a:pt x="2721655" y="1299881"/>
-                  </a:lnTo>
-                  <a:lnTo>
-                    <a:pt x="2793278" y="1323723"/>
-                  </a:lnTo>
-                  <a:lnTo>
-                    <a:pt x="2864901" y="1347150"/>
-                  </a:lnTo>
-                  <a:lnTo>
-                    <a:pt x="2936523" y="1370169"/>
-                  </a:lnTo>
-                  <a:lnTo>
-                    <a:pt x="3008146" y="1392787"/>
-                  </a:lnTo>
-                  <a:lnTo>
-                    <a:pt x="3079768" y="1415011"/>
-                  </a:lnTo>
-                  <a:lnTo>
-                    <a:pt x="3151391" y="1436848"/>
-                  </a:lnTo>
-                  <a:lnTo>
-                    <a:pt x="3223013" y="1458306"/>
-                  </a:lnTo>
-                  <a:lnTo>
-                    <a:pt x="3294636" y="1479389"/>
-                  </a:lnTo>
-                  <a:lnTo>
-                    <a:pt x="3366258" y="1500105"/>
-                  </a:lnTo>
-                  <a:lnTo>
-                    <a:pt x="3437881" y="1520461"/>
-                  </a:lnTo>
-                  <a:lnTo>
-                    <a:pt x="3509503" y="1540462"/>
-                  </a:lnTo>
-                  <a:lnTo>
-                    <a:pt x="3581126" y="1560115"/>
-                  </a:lnTo>
-                  <a:lnTo>
-                    <a:pt x="3652748" y="1579426"/>
-                  </a:lnTo>
-                  <a:lnTo>
-                    <a:pt x="3724371" y="1598401"/>
-                  </a:lnTo>
-                  <a:lnTo>
-                    <a:pt x="3795993" y="1617045"/>
-                  </a:lnTo>
-                  <a:lnTo>
-                    <a:pt x="3867616" y="1635365"/>
-                  </a:lnTo>
-                  <a:lnTo>
-                    <a:pt x="3939238" y="1653365"/>
-                  </a:lnTo>
-                  <a:lnTo>
-                    <a:pt x="4010861" y="1671052"/>
-                  </a:lnTo>
-                  <a:lnTo>
-                    <a:pt x="4082483" y="1688432"/>
-                  </a:lnTo>
-                  <a:lnTo>
-                    <a:pt x="4154106" y="1705508"/>
-                  </a:lnTo>
-                  <a:lnTo>
-                    <a:pt x="4225729" y="1722288"/>
-                  </a:lnTo>
-                  <a:lnTo>
-                    <a:pt x="4297351" y="1738775"/>
-                  </a:lnTo>
-                  <a:lnTo>
-                    <a:pt x="4368974" y="1754975"/>
-                  </a:lnTo>
-                  <a:lnTo>
-                    <a:pt x="4440596" y="1770893"/>
-                  </a:lnTo>
-                  <a:lnTo>
-                    <a:pt x="4512219" y="1786534"/>
-                  </a:lnTo>
-                  <a:lnTo>
-                    <a:pt x="4583841" y="1801902"/>
-                  </a:lnTo>
-                  <a:lnTo>
-                    <a:pt x="4655464" y="1817003"/>
-                  </a:lnTo>
-                  <a:lnTo>
-                    <a:pt x="4727086" y="1831841"/>
-                  </a:lnTo>
-                  <a:lnTo>
-                    <a:pt x="4798709" y="1840694"/>
-                  </a:lnTo>
-                  <a:lnTo>
-                    <a:pt x="4870331" y="1842777"/>
-                  </a:lnTo>
-                  <a:lnTo>
-                    <a:pt x="4941954" y="1844855"/>
-                  </a:lnTo>
-                  <a:lnTo>
-                    <a:pt x="5013576" y="1846928"/>
-                  </a:lnTo>
-                  <a:lnTo>
-                    <a:pt x="5085199" y="1848996"/>
-                  </a:lnTo>
-                  <a:lnTo>
-                    <a:pt x="5156821" y="1851058"/>
-                  </a:lnTo>
-                  <a:lnTo>
-                    <a:pt x="5228444" y="1853115"/>
-                  </a:lnTo>
-                  <a:lnTo>
-                    <a:pt x="5300066" y="1855168"/>
-                  </a:lnTo>
-                  <a:lnTo>
-                    <a:pt x="5371689" y="1857214"/>
-                  </a:lnTo>
-                  <a:lnTo>
-                    <a:pt x="5443311" y="1859256"/>
-                  </a:lnTo>
-                  <a:lnTo>
-                    <a:pt x="5514934" y="1861293"/>
-                  </a:lnTo>
-                  <a:lnTo>
-                    <a:pt x="5586557" y="1863324"/>
-                  </a:lnTo>
-                  <a:lnTo>
-                    <a:pt x="5658179" y="1865351"/>
-                  </a:lnTo>
-                  <a:lnTo>
-                    <a:pt x="5729802" y="1867372"/>
-                  </a:lnTo>
-                  <a:lnTo>
-                    <a:pt x="5801424" y="1869388"/>
-                  </a:lnTo>
-                  <a:lnTo>
-                    <a:pt x="5873047" y="1871400"/>
-                  </a:lnTo>
-                  <a:lnTo>
-                    <a:pt x="5944669" y="1873406"/>
-                  </a:lnTo>
-                  <a:lnTo>
-                    <a:pt x="6016292" y="1875407"/>
-                  </a:lnTo>
-                  <a:lnTo>
-                    <a:pt x="6087914" y="1877403"/>
-                  </a:lnTo>
-                  <a:lnTo>
-                    <a:pt x="6159537" y="1879394"/>
-                  </a:lnTo>
-                  <a:lnTo>
-                    <a:pt x="6231159" y="1881380"/>
-                  </a:lnTo>
-                  <a:lnTo>
-                    <a:pt x="6302782" y="1883361"/>
-                  </a:lnTo>
-                  <a:lnTo>
-                    <a:pt x="6374404" y="1885337"/>
-                  </a:lnTo>
-                  <a:lnTo>
-                    <a:pt x="6446027" y="1887308"/>
-                  </a:lnTo>
-                  <a:lnTo>
-                    <a:pt x="6517649" y="1889274"/>
-                  </a:lnTo>
-                  <a:lnTo>
-                    <a:pt x="6589272" y="1891235"/>
-                  </a:lnTo>
-                  <a:lnTo>
-                    <a:pt x="6660894" y="1893191"/>
-                  </a:lnTo>
-                  <a:lnTo>
-                    <a:pt x="6732517" y="1895143"/>
-                  </a:lnTo>
-                  <a:lnTo>
-                    <a:pt x="6804139" y="1897089"/>
-                  </a:lnTo>
-                  <a:lnTo>
-                    <a:pt x="6875762" y="1899031"/>
-                  </a:lnTo>
-                  <a:lnTo>
-                    <a:pt x="6947385" y="1900967"/>
-                  </a:lnTo>
-                  <a:lnTo>
-                    <a:pt x="7019007" y="1902899"/>
-                  </a:lnTo>
-                  <a:lnTo>
-                    <a:pt x="7090630" y="1904826"/>
-                  </a:lnTo>
-                  <a:lnTo>
-                    <a:pt x="7090630" y="2200194"/>
-                  </a:lnTo>
-                  <a:lnTo>
-                    <a:pt x="7019007" y="2191884"/>
-                  </a:lnTo>
-                  <a:lnTo>
-                    <a:pt x="6947385" y="2183426"/>
-                  </a:lnTo>
-                  <a:lnTo>
-                    <a:pt x="6875762" y="2174818"/>
-                  </a:lnTo>
-                  <a:lnTo>
-                    <a:pt x="6804139" y="2166057"/>
-                  </a:lnTo>
-                  <a:lnTo>
-                    <a:pt x="6732517" y="2157142"/>
-                  </a:lnTo>
-                  <a:lnTo>
-                    <a:pt x="6660894" y="2148068"/>
-                  </a:lnTo>
-                  <a:lnTo>
-                    <a:pt x="6589272" y="2138834"/>
-                  </a:lnTo>
-                  <a:lnTo>
-                    <a:pt x="6517649" y="2129436"/>
-                  </a:lnTo>
-                  <a:lnTo>
-                    <a:pt x="6446027" y="2119871"/>
-                  </a:lnTo>
-                  <a:lnTo>
-                    <a:pt x="6374404" y="2110137"/>
-                  </a:lnTo>
-                  <a:lnTo>
-                    <a:pt x="6302782" y="2100230"/>
-                  </a:lnTo>
-                  <a:lnTo>
-                    <a:pt x="6231159" y="2090148"/>
-                  </a:lnTo>
-                  <a:lnTo>
-                    <a:pt x="6159537" y="2079888"/>
-                  </a:lnTo>
-                  <a:lnTo>
-                    <a:pt x="6087914" y="2069445"/>
-                  </a:lnTo>
-                  <a:lnTo>
-                    <a:pt x="6016292" y="2058817"/>
-                  </a:lnTo>
-                  <a:lnTo>
-                    <a:pt x="5944669" y="2048001"/>
-                  </a:lnTo>
-                  <a:lnTo>
-                    <a:pt x="5873047" y="2036994"/>
-                  </a:lnTo>
-                  <a:lnTo>
-                    <a:pt x="5801424" y="2025791"/>
-                  </a:lnTo>
-                  <a:lnTo>
-                    <a:pt x="5729802" y="2014390"/>
-                  </a:lnTo>
-                  <a:lnTo>
-                    <a:pt x="5658179" y="2002787"/>
-                  </a:lnTo>
-                  <a:lnTo>
-                    <a:pt x="5586557" y="1990978"/>
-                  </a:lnTo>
-                  <a:lnTo>
-                    <a:pt x="5514934" y="1978960"/>
-                  </a:lnTo>
-                  <a:lnTo>
-                    <a:pt x="5443311" y="1966729"/>
-                  </a:lnTo>
-                  <a:lnTo>
-                    <a:pt x="5371689" y="1954281"/>
-                  </a:lnTo>
-                  <a:lnTo>
-                    <a:pt x="5300066" y="1941613"/>
-                  </a:lnTo>
-                  <a:lnTo>
-                    <a:pt x="5228444" y="1928720"/>
-                  </a:lnTo>
-                  <a:lnTo>
-                    <a:pt x="5156821" y="1915598"/>
-                  </a:lnTo>
-                  <a:lnTo>
-                    <a:pt x="5085199" y="1902245"/>
-                  </a:lnTo>
-                  <a:lnTo>
-                    <a:pt x="5013576" y="1888654"/>
-                  </a:lnTo>
-                  <a:lnTo>
-                    <a:pt x="4941954" y="1874823"/>
-                  </a:lnTo>
-                  <a:lnTo>
-                    <a:pt x="4870331" y="1860747"/>
-                  </a:lnTo>
-                  <a:lnTo>
-                    <a:pt x="4798709" y="1846421"/>
-                  </a:lnTo>
-                  <a:lnTo>
-                    <a:pt x="4727086" y="1838605"/>
-                  </a:lnTo>
-                  <a:lnTo>
-                    <a:pt x="4655464" y="1836512"/>
-                  </a:lnTo>
-                  <a:lnTo>
-                    <a:pt x="4583841" y="1834412"/>
-                  </a:lnTo>
-                  <a:lnTo>
-                    <a:pt x="4512219" y="1832308"/>
-                  </a:lnTo>
-                  <a:lnTo>
-                    <a:pt x="4440596" y="1830198"/>
-                  </a:lnTo>
-                  <a:lnTo>
-                    <a:pt x="4368974" y="1828083"/>
-                  </a:lnTo>
-                  <a:lnTo>
-                    <a:pt x="4297351" y="1825963"/>
-                  </a:lnTo>
-                  <a:lnTo>
-                    <a:pt x="4225729" y="1823837"/>
-                  </a:lnTo>
-                  <a:lnTo>
-                    <a:pt x="4154106" y="1821706"/>
-                  </a:lnTo>
-                  <a:lnTo>
-                    <a:pt x="4082483" y="1819570"/>
-                  </a:lnTo>
-                  <a:lnTo>
-                    <a:pt x="4010861" y="1817428"/>
-                  </a:lnTo>
-                  <a:lnTo>
-                    <a:pt x="3939238" y="1815281"/>
-                  </a:lnTo>
-                  <a:lnTo>
-                    <a:pt x="3867616" y="1813128"/>
-                  </a:lnTo>
-                  <a:lnTo>
-                    <a:pt x="3795993" y="1810970"/>
-                  </a:lnTo>
-                  <a:lnTo>
-                    <a:pt x="3724371" y="1808807"/>
-                  </a:lnTo>
-                  <a:lnTo>
-                    <a:pt x="3652748" y="1806638"/>
-                  </a:lnTo>
-                  <a:lnTo>
-                    <a:pt x="3581126" y="1804463"/>
-                  </a:lnTo>
-                  <a:lnTo>
-                    <a:pt x="3509503" y="1802283"/>
-                  </a:lnTo>
-                  <a:lnTo>
-                    <a:pt x="3437881" y="1800098"/>
-                  </a:lnTo>
-                  <a:lnTo>
-                    <a:pt x="3366258" y="1797907"/>
-                  </a:lnTo>
-                  <a:lnTo>
-                    <a:pt x="3294636" y="1795711"/>
-                  </a:lnTo>
-                  <a:lnTo>
-                    <a:pt x="3223013" y="1793509"/>
-                  </a:lnTo>
-                  <a:lnTo>
-                    <a:pt x="3151391" y="1791301"/>
-                  </a:lnTo>
-                  <a:lnTo>
-                    <a:pt x="3079768" y="1789088"/>
-                  </a:lnTo>
-                  <a:lnTo>
-                    <a:pt x="3008146" y="1786869"/>
-                  </a:lnTo>
-                  <a:lnTo>
-                    <a:pt x="2936523" y="1784645"/>
-                  </a:lnTo>
-                  <a:lnTo>
-                    <a:pt x="2864901" y="1782415"/>
-                  </a:lnTo>
-                  <a:lnTo>
-                    <a:pt x="2793278" y="1780180"/>
-                  </a:lnTo>
-                  <a:lnTo>
-                    <a:pt x="2721655" y="1777939"/>
-                  </a:lnTo>
-                  <a:lnTo>
-                    <a:pt x="2650033" y="1775692"/>
-                  </a:lnTo>
-                  <a:lnTo>
-                    <a:pt x="2578410" y="1773439"/>
-                  </a:lnTo>
-                  <a:lnTo>
-                    <a:pt x="2506788" y="1771181"/>
-                  </a:lnTo>
-                  <a:lnTo>
-                    <a:pt x="2435165" y="1768917"/>
-                  </a:lnTo>
-                  <a:lnTo>
-                    <a:pt x="2363543" y="1766648"/>
-                  </a:lnTo>
-                  <a:lnTo>
-                    <a:pt x="2291920" y="1764373"/>
-                  </a:lnTo>
-                  <a:lnTo>
-                    <a:pt x="2220298" y="1762092"/>
-                  </a:lnTo>
-                  <a:lnTo>
-                    <a:pt x="2148675" y="1759805"/>
-                  </a:lnTo>
-                  <a:lnTo>
-                    <a:pt x="2077053" y="1757513"/>
-                  </a:lnTo>
-                  <a:lnTo>
-                    <a:pt x="2005430" y="1755214"/>
-                  </a:lnTo>
-                  <a:lnTo>
-                    <a:pt x="1933808" y="1752910"/>
-                  </a:lnTo>
-                  <a:lnTo>
-                    <a:pt x="1862185" y="1750600"/>
-                  </a:lnTo>
-                  <a:lnTo>
-                    <a:pt x="1790563" y="1748285"/>
-                  </a:lnTo>
-                  <a:lnTo>
-                    <a:pt x="1718940" y="1745963"/>
-                  </a:lnTo>
-                  <a:lnTo>
-                    <a:pt x="1647318" y="1743636"/>
-                  </a:lnTo>
-                  <a:lnTo>
-                    <a:pt x="1575695" y="1741303"/>
-                  </a:lnTo>
-                  <a:lnTo>
-                    <a:pt x="1504073" y="1738963"/>
-                  </a:lnTo>
-                  <a:lnTo>
-                    <a:pt x="1432450" y="1736618"/>
-                  </a:lnTo>
-                  <a:lnTo>
-                    <a:pt x="1360827" y="1734268"/>
-                  </a:lnTo>
-                  <a:lnTo>
-                    <a:pt x="1289205" y="1731911"/>
-                  </a:lnTo>
-                  <a:lnTo>
-                    <a:pt x="1217582" y="1729548"/>
-                  </a:lnTo>
-                  <a:lnTo>
-                    <a:pt x="1145960" y="1727179"/>
-                  </a:lnTo>
-                  <a:lnTo>
-                    <a:pt x="1074337" y="1724804"/>
-                  </a:lnTo>
-                  <a:lnTo>
-                    <a:pt x="1002715" y="1722424"/>
-                  </a:lnTo>
-                  <a:lnTo>
-                    <a:pt x="931092" y="1720037"/>
-                  </a:lnTo>
-                  <a:lnTo>
-                    <a:pt x="859470" y="1717644"/>
-                  </a:lnTo>
-                  <a:lnTo>
-                    <a:pt x="787847" y="1715245"/>
-                  </a:lnTo>
-                  <a:lnTo>
-                    <a:pt x="716225" y="1712841"/>
-                  </a:lnTo>
-                  <a:lnTo>
-                    <a:pt x="644602" y="1710430"/>
-                  </a:lnTo>
-                  <a:lnTo>
-                    <a:pt x="572980" y="1708013"/>
-                  </a:lnTo>
-                  <a:lnTo>
-                    <a:pt x="501357" y="1705590"/>
-                  </a:lnTo>
-                  <a:lnTo>
-                    <a:pt x="429735" y="1703161"/>
-                  </a:lnTo>
-                  <a:lnTo>
-                    <a:pt x="358112" y="1700725"/>
-                  </a:lnTo>
-                  <a:lnTo>
-                    <a:pt x="286490" y="1698284"/>
-                  </a:lnTo>
-                  <a:lnTo>
-                    <a:pt x="214867" y="1695836"/>
-                  </a:lnTo>
-                  <a:lnTo>
-                    <a:pt x="143245" y="1693383"/>
-                  </a:lnTo>
-                  <a:lnTo>
-                    <a:pt x="71622" y="1690923"/>
-                  </a:lnTo>
-                  <a:lnTo>
-                    <a:pt x="0" y="1688457"/>
+                    <a:pt x="71622" y="47048"/>
+                  </a:lnTo>
+                  <a:lnTo>
+                    <a:pt x="143245" y="93273"/>
+                  </a:lnTo>
+                  <a:lnTo>
+                    <a:pt x="214867" y="138689"/>
+                  </a:lnTo>
+                  <a:lnTo>
+                    <a:pt x="286490" y="183309"/>
+                  </a:lnTo>
+                  <a:lnTo>
+                    <a:pt x="358112" y="227148"/>
+                  </a:lnTo>
+                  <a:lnTo>
+                    <a:pt x="429735" y="270220"/>
+                  </a:lnTo>
+                  <a:lnTo>
+                    <a:pt x="501357" y="312537"/>
+                  </a:lnTo>
+                  <a:lnTo>
+                    <a:pt x="572980" y="354113"/>
+                  </a:lnTo>
+                  <a:lnTo>
+                    <a:pt x="644602" y="394962"/>
+                  </a:lnTo>
+                  <a:lnTo>
+                    <a:pt x="716225" y="435095"/>
+                  </a:lnTo>
+                  <a:lnTo>
+                    <a:pt x="787847" y="474525"/>
+                  </a:lnTo>
+                  <a:lnTo>
+                    <a:pt x="859470" y="513265"/>
+                  </a:lnTo>
+                  <a:lnTo>
+                    <a:pt x="931092" y="551327"/>
+                  </a:lnTo>
+                  <a:lnTo>
+                    <a:pt x="1002715" y="588722"/>
+                  </a:lnTo>
+                  <a:lnTo>
+                    <a:pt x="1074337" y="625462"/>
+                  </a:lnTo>
+                  <a:lnTo>
+                    <a:pt x="1145960" y="661559"/>
+                  </a:lnTo>
+                  <a:lnTo>
+                    <a:pt x="1217582" y="697024"/>
+                  </a:lnTo>
+                  <a:lnTo>
+                    <a:pt x="1289205" y="731868"/>
+                  </a:lnTo>
+                  <a:lnTo>
+                    <a:pt x="1360827" y="766102"/>
+                  </a:lnTo>
+                  <a:lnTo>
+                    <a:pt x="1432450" y="799737"/>
+                  </a:lnTo>
+                  <a:lnTo>
+                    <a:pt x="1504073" y="832783"/>
+                  </a:lnTo>
+                  <a:lnTo>
+                    <a:pt x="1575695" y="865249"/>
+                  </a:lnTo>
+                  <a:lnTo>
+                    <a:pt x="1647318" y="897148"/>
+                  </a:lnTo>
+                  <a:lnTo>
+                    <a:pt x="1718940" y="928488"/>
+                  </a:lnTo>
+                  <a:lnTo>
+                    <a:pt x="1790563" y="959279"/>
+                  </a:lnTo>
+                  <a:lnTo>
+                    <a:pt x="1862185" y="989531"/>
+                  </a:lnTo>
+                  <a:lnTo>
+                    <a:pt x="1933808" y="1019253"/>
+                  </a:lnTo>
+                  <a:lnTo>
+                    <a:pt x="2005430" y="1048455"/>
+                  </a:lnTo>
+                  <a:lnTo>
+                    <a:pt x="2077053" y="1077146"/>
+                  </a:lnTo>
+                  <a:lnTo>
+                    <a:pt x="2148675" y="1105334"/>
+                  </a:lnTo>
+                  <a:lnTo>
+                    <a:pt x="2220298" y="1133029"/>
+                  </a:lnTo>
+                  <a:lnTo>
+                    <a:pt x="2291920" y="1160238"/>
+                  </a:lnTo>
+                  <a:lnTo>
+                    <a:pt x="2363543" y="1186972"/>
+                  </a:lnTo>
+                  <a:lnTo>
+                    <a:pt x="2435165" y="1213237"/>
+                  </a:lnTo>
+                  <a:lnTo>
+                    <a:pt x="2506788" y="1239042"/>
+                  </a:lnTo>
+                  <a:lnTo>
+                    <a:pt x="2578410" y="1264396"/>
+                  </a:lnTo>
+                  <a:lnTo>
+                    <a:pt x="2650033" y="1289305"/>
+                  </a:lnTo>
+                  <a:lnTo>
+                    <a:pt x="2721655" y="1313779"/>
+                  </a:lnTo>
+                  <a:lnTo>
+                    <a:pt x="2793278" y="1337823"/>
+                  </a:lnTo>
+                  <a:lnTo>
+                    <a:pt x="2864901" y="1361447"/>
+                  </a:lnTo>
+                  <a:lnTo>
+                    <a:pt x="2936523" y="1384657"/>
+                  </a:lnTo>
+                  <a:lnTo>
+                    <a:pt x="3008146" y="1407461"/>
+                  </a:lnTo>
+                  <a:lnTo>
+                    <a:pt x="3079768" y="1429866"/>
+                  </a:lnTo>
+                  <a:lnTo>
+                    <a:pt x="3151391" y="1451878"/>
+                  </a:lnTo>
+                  <a:lnTo>
+                    <a:pt x="3223013" y="1473505"/>
+                  </a:lnTo>
+                  <a:lnTo>
+                    <a:pt x="3294636" y="1494753"/>
+                  </a:lnTo>
+                  <a:lnTo>
+                    <a:pt x="3366258" y="1515629"/>
+                  </a:lnTo>
+                  <a:lnTo>
+                    <a:pt x="3437881" y="1536139"/>
+                  </a:lnTo>
+                  <a:lnTo>
+                    <a:pt x="3509503" y="1556290"/>
+                  </a:lnTo>
+                  <a:lnTo>
+                    <a:pt x="3581126" y="1576089"/>
+                  </a:lnTo>
+                  <a:lnTo>
+                    <a:pt x="3652748" y="1595541"/>
+                  </a:lnTo>
+                  <a:lnTo>
+                    <a:pt x="3724371" y="1614652"/>
+                  </a:lnTo>
+                  <a:lnTo>
+                    <a:pt x="3795993" y="1633429"/>
+                  </a:lnTo>
+                  <a:lnTo>
+                    <a:pt x="3867616" y="1651877"/>
+                  </a:lnTo>
+                  <a:lnTo>
+                    <a:pt x="3939238" y="1670001"/>
+                  </a:lnTo>
+                  <a:lnTo>
+                    <a:pt x="4010861" y="1687809"/>
+                  </a:lnTo>
+                  <a:lnTo>
+                    <a:pt x="4082483" y="1705304"/>
+                  </a:lnTo>
+                  <a:lnTo>
+                    <a:pt x="4154106" y="1722494"/>
+                  </a:lnTo>
+                  <a:lnTo>
+                    <a:pt x="4225729" y="1739382"/>
+                  </a:lnTo>
+                  <a:lnTo>
+                    <a:pt x="4297351" y="1755975"/>
+                  </a:lnTo>
+                  <a:lnTo>
+                    <a:pt x="4368974" y="1772277"/>
+                  </a:lnTo>
+                  <a:lnTo>
+                    <a:pt x="4440596" y="1788293"/>
+                  </a:lnTo>
+                  <a:lnTo>
+                    <a:pt x="4512219" y="1804030"/>
+                  </a:lnTo>
+                  <a:lnTo>
+                    <a:pt x="4583841" y="1819490"/>
+                  </a:lnTo>
+                  <a:lnTo>
+                    <a:pt x="4655464" y="1834680"/>
+                  </a:lnTo>
+                  <a:lnTo>
+                    <a:pt x="4727086" y="1849604"/>
+                  </a:lnTo>
+                  <a:lnTo>
+                    <a:pt x="4798709" y="1858547"/>
+                  </a:lnTo>
+                  <a:lnTo>
+                    <a:pt x="4870331" y="1860727"/>
+                  </a:lnTo>
+                  <a:lnTo>
+                    <a:pt x="4941954" y="1862901"/>
+                  </a:lnTo>
+                  <a:lnTo>
+                    <a:pt x="5013576" y="1865070"/>
+                  </a:lnTo>
+                  <a:lnTo>
+                    <a:pt x="5085199" y="1867232"/>
+                  </a:lnTo>
+                  <a:lnTo>
+                    <a:pt x="5156821" y="1869390"/>
+                  </a:lnTo>
+                  <a:lnTo>
+                    <a:pt x="5228444" y="1871541"/>
+                  </a:lnTo>
+                  <a:lnTo>
+                    <a:pt x="5300066" y="1873687"/>
+                  </a:lnTo>
+                  <a:lnTo>
+                    <a:pt x="5371689" y="1875827"/>
+                  </a:lnTo>
+                  <a:lnTo>
+                    <a:pt x="5443311" y="1877961"/>
+                  </a:lnTo>
+                  <a:lnTo>
+                    <a:pt x="5514934" y="1880090"/>
+                  </a:lnTo>
+                  <a:lnTo>
+                    <a:pt x="5586557" y="1882214"/>
+                  </a:lnTo>
+                  <a:lnTo>
+                    <a:pt x="5658179" y="1884331"/>
+                  </a:lnTo>
+                  <a:lnTo>
+                    <a:pt x="5729802" y="1886444"/>
+                  </a:lnTo>
+                  <a:lnTo>
+                    <a:pt x="5801424" y="1888550"/>
+                  </a:lnTo>
+                  <a:lnTo>
+                    <a:pt x="5873047" y="1890651"/>
+                  </a:lnTo>
+                  <a:lnTo>
+                    <a:pt x="5944669" y="1892747"/>
+                  </a:lnTo>
+                  <a:lnTo>
+                    <a:pt x="6016292" y="1894837"/>
+                  </a:lnTo>
+                  <a:lnTo>
+                    <a:pt x="6087914" y="1896921"/>
+                  </a:lnTo>
+                  <a:lnTo>
+                    <a:pt x="6159537" y="1899000"/>
+                  </a:lnTo>
+                  <a:lnTo>
+                    <a:pt x="6231159" y="1901074"/>
+                  </a:lnTo>
+                  <a:lnTo>
+                    <a:pt x="6302782" y="1903142"/>
+                  </a:lnTo>
+                  <a:lnTo>
+                    <a:pt x="6374404" y="1905204"/>
+                  </a:lnTo>
+                  <a:lnTo>
+                    <a:pt x="6446027" y="1907262"/>
+                  </a:lnTo>
+                  <a:lnTo>
+                    <a:pt x="6517649" y="1909313"/>
+                  </a:lnTo>
+                  <a:lnTo>
+                    <a:pt x="6589272" y="1911360"/>
+                  </a:lnTo>
+                  <a:lnTo>
+                    <a:pt x="6660894" y="1913401"/>
+                  </a:lnTo>
+                  <a:lnTo>
+                    <a:pt x="6732517" y="1915436"/>
+                  </a:lnTo>
+                  <a:lnTo>
+                    <a:pt x="6804139" y="1917467"/>
+                  </a:lnTo>
+                  <a:lnTo>
+                    <a:pt x="6875762" y="1919492"/>
+                  </a:lnTo>
+                  <a:lnTo>
+                    <a:pt x="6947385" y="1921511"/>
+                  </a:lnTo>
+                  <a:lnTo>
+                    <a:pt x="7019007" y="1923526"/>
+                  </a:lnTo>
+                  <a:lnTo>
+                    <a:pt x="7090630" y="1925535"/>
+                  </a:lnTo>
+                  <a:lnTo>
+                    <a:pt x="7090630" y="2219522"/>
+                  </a:lnTo>
+                  <a:lnTo>
+                    <a:pt x="7019007" y="2211190"/>
+                  </a:lnTo>
+                  <a:lnTo>
+                    <a:pt x="6947385" y="2202710"/>
+                  </a:lnTo>
+                  <a:lnTo>
+                    <a:pt x="6875762" y="2194080"/>
+                  </a:lnTo>
+                  <a:lnTo>
+                    <a:pt x="6804139" y="2185295"/>
+                  </a:lnTo>
+                  <a:lnTo>
+                    <a:pt x="6732517" y="2176353"/>
+                  </a:lnTo>
+                  <a:lnTo>
+                    <a:pt x="6660894" y="2167253"/>
+                  </a:lnTo>
+                  <a:lnTo>
+                    <a:pt x="6589272" y="2157990"/>
+                  </a:lnTo>
+                  <a:lnTo>
+                    <a:pt x="6517649" y="2148562"/>
+                  </a:lnTo>
+                  <a:lnTo>
+                    <a:pt x="6446027" y="2138966"/>
+                  </a:lnTo>
+                  <a:lnTo>
+                    <a:pt x="6374404" y="2129199"/>
+                  </a:lnTo>
+                  <a:lnTo>
+                    <a:pt x="6302782" y="2119258"/>
+                  </a:lnTo>
+                  <a:lnTo>
+                    <a:pt x="6231159" y="2109139"/>
+                  </a:lnTo>
+                  <a:lnTo>
+                    <a:pt x="6159537" y="2098841"/>
+                  </a:lnTo>
+                  <a:lnTo>
+                    <a:pt x="6087914" y="2088359"/>
+                  </a:lnTo>
+                  <a:lnTo>
+                    <a:pt x="6016292" y="2077690"/>
+                  </a:lnTo>
+                  <a:lnTo>
+                    <a:pt x="5944669" y="2066831"/>
+                  </a:lnTo>
+                  <a:lnTo>
+                    <a:pt x="5873047" y="2055778"/>
+                  </a:lnTo>
+                  <a:lnTo>
+                    <a:pt x="5801424" y="2044528"/>
+                  </a:lnTo>
+                  <a:lnTo>
+                    <a:pt x="5729802" y="2033078"/>
+                  </a:lnTo>
+                  <a:lnTo>
+                    <a:pt x="5658179" y="2021424"/>
+                  </a:lnTo>
+                  <a:lnTo>
+                    <a:pt x="5586557" y="2009562"/>
+                  </a:lnTo>
+                  <a:lnTo>
+                    <a:pt x="5514934" y="1997489"/>
+                  </a:lnTo>
+                  <a:lnTo>
+                    <a:pt x="5443311" y="1985201"/>
+                  </a:lnTo>
+                  <a:lnTo>
+                    <a:pt x="5371689" y="1972693"/>
+                  </a:lnTo>
+                  <a:lnTo>
+                    <a:pt x="5300066" y="1959963"/>
+                  </a:lnTo>
+                  <a:lnTo>
+                    <a:pt x="5228444" y="1947006"/>
+                  </a:lnTo>
+                  <a:lnTo>
+                    <a:pt x="5156821" y="1933818"/>
+                  </a:lnTo>
+                  <a:lnTo>
+                    <a:pt x="5085199" y="1920395"/>
+                  </a:lnTo>
+                  <a:lnTo>
+                    <a:pt x="5013576" y="1906732"/>
+                  </a:lnTo>
+                  <a:lnTo>
+                    <a:pt x="4941954" y="1892826"/>
+                  </a:lnTo>
+                  <a:lnTo>
+                    <a:pt x="4870331" y="1878673"/>
+                  </a:lnTo>
+                  <a:lnTo>
+                    <a:pt x="4798709" y="1864267"/>
+                  </a:lnTo>
+                  <a:lnTo>
+                    <a:pt x="4727086" y="1856361"/>
+                  </a:lnTo>
+                  <a:lnTo>
+                    <a:pt x="4655464" y="1854170"/>
+                  </a:lnTo>
+                  <a:lnTo>
+                    <a:pt x="4583841" y="1851972"/>
+                  </a:lnTo>
+                  <a:lnTo>
+                    <a:pt x="4512219" y="1849769"/>
+                  </a:lnTo>
+                  <a:lnTo>
+                    <a:pt x="4440596" y="1847560"/>
+                  </a:lnTo>
+                  <a:lnTo>
+                    <a:pt x="4368974" y="1845346"/>
+                  </a:lnTo>
+                  <a:lnTo>
+                    <a:pt x="4297351" y="1843125"/>
+                  </a:lnTo>
+                  <a:lnTo>
+                    <a:pt x="4225729" y="1840899"/>
+                  </a:lnTo>
+                  <a:lnTo>
+                    <a:pt x="4154106" y="1838666"/>
+                  </a:lnTo>
+                  <a:lnTo>
+                    <a:pt x="4082483" y="1836428"/>
+                  </a:lnTo>
+                  <a:lnTo>
+                    <a:pt x="4010861" y="1834184"/>
+                  </a:lnTo>
+                  <a:lnTo>
+                    <a:pt x="3939238" y="1831934"/>
+                  </a:lnTo>
+                  <a:lnTo>
+                    <a:pt x="3867616" y="1829678"/>
+                  </a:lnTo>
+                  <a:lnTo>
+                    <a:pt x="3795993" y="1827416"/>
+                  </a:lnTo>
+                  <a:lnTo>
+                    <a:pt x="3724371" y="1825148"/>
+                  </a:lnTo>
+                  <a:lnTo>
+                    <a:pt x="3652748" y="1822875"/>
+                  </a:lnTo>
+                  <a:lnTo>
+                    <a:pt x="3581126" y="1820595"/>
+                  </a:lnTo>
+                  <a:lnTo>
+                    <a:pt x="3509503" y="1818309"/>
+                  </a:lnTo>
+                  <a:lnTo>
+                    <a:pt x="3437881" y="1816017"/>
+                  </a:lnTo>
+                  <a:lnTo>
+                    <a:pt x="3366258" y="1813719"/>
+                  </a:lnTo>
+                  <a:lnTo>
+                    <a:pt x="3294636" y="1811415"/>
+                  </a:lnTo>
+                  <a:lnTo>
+                    <a:pt x="3223013" y="1809105"/>
+                  </a:lnTo>
+                  <a:lnTo>
+                    <a:pt x="3151391" y="1806789"/>
+                  </a:lnTo>
+                  <a:lnTo>
+                    <a:pt x="3079768" y="1804466"/>
+                  </a:lnTo>
+                  <a:lnTo>
+                    <a:pt x="3008146" y="1802138"/>
+                  </a:lnTo>
+                  <a:lnTo>
+                    <a:pt x="2936523" y="1799803"/>
+                  </a:lnTo>
+                  <a:lnTo>
+                    <a:pt x="2864901" y="1797463"/>
+                  </a:lnTo>
+                  <a:lnTo>
+                    <a:pt x="2793278" y="1795116"/>
+                  </a:lnTo>
+                  <a:lnTo>
+                    <a:pt x="2721655" y="1792763"/>
+                  </a:lnTo>
+                  <a:lnTo>
+                    <a:pt x="2650033" y="1790403"/>
+                  </a:lnTo>
+                  <a:lnTo>
+                    <a:pt x="2578410" y="1788038"/>
+                  </a:lnTo>
+                  <a:lnTo>
+                    <a:pt x="2506788" y="1785666"/>
+                  </a:lnTo>
+                  <a:lnTo>
+                    <a:pt x="2435165" y="1783288"/>
+                  </a:lnTo>
+                  <a:lnTo>
+                    <a:pt x="2363543" y="1780904"/>
+                  </a:lnTo>
+                  <a:lnTo>
+                    <a:pt x="2291920" y="1778513"/>
+                  </a:lnTo>
+                  <a:lnTo>
+                    <a:pt x="2220298" y="1776116"/>
+                  </a:lnTo>
+                  <a:lnTo>
+                    <a:pt x="2148675" y="1773713"/>
+                  </a:lnTo>
+                  <a:lnTo>
+                    <a:pt x="2077053" y="1771304"/>
+                  </a:lnTo>
+                  <a:lnTo>
+                    <a:pt x="2005430" y="1768888"/>
+                  </a:lnTo>
+                  <a:lnTo>
+                    <a:pt x="1933808" y="1766465"/>
+                  </a:lnTo>
+                  <a:lnTo>
+                    <a:pt x="1862185" y="1764037"/>
+                  </a:lnTo>
+                  <a:lnTo>
+                    <a:pt x="1790563" y="1761602"/>
+                  </a:lnTo>
+                  <a:lnTo>
+                    <a:pt x="1718940" y="1759160"/>
+                  </a:lnTo>
+                  <a:lnTo>
+                    <a:pt x="1647318" y="1756712"/>
+                  </a:lnTo>
+                  <a:lnTo>
+                    <a:pt x="1575695" y="1754258"/>
+                  </a:lnTo>
+                  <a:lnTo>
+                    <a:pt x="1504073" y="1751797"/>
+                  </a:lnTo>
+                  <a:lnTo>
+                    <a:pt x="1432450" y="1749330"/>
+                  </a:lnTo>
+                  <a:lnTo>
+                    <a:pt x="1360827" y="1746856"/>
+                  </a:lnTo>
+                  <a:lnTo>
+                    <a:pt x="1289205" y="1744375"/>
+                  </a:lnTo>
+                  <a:lnTo>
+                    <a:pt x="1217582" y="1741888"/>
+                  </a:lnTo>
+                  <a:lnTo>
+                    <a:pt x="1145960" y="1739395"/>
+                  </a:lnTo>
+                  <a:lnTo>
+                    <a:pt x="1074337" y="1736895"/>
+                  </a:lnTo>
+                  <a:lnTo>
+                    <a:pt x="1002715" y="1734388"/>
+                  </a:lnTo>
+                  <a:lnTo>
+                    <a:pt x="931092" y="1731875"/>
+                  </a:lnTo>
+                  <a:lnTo>
+                    <a:pt x="859470" y="1729355"/>
+                  </a:lnTo>
+                  <a:lnTo>
+                    <a:pt x="787847" y="1726828"/>
+                  </a:lnTo>
+                  <a:lnTo>
+                    <a:pt x="716225" y="1724295"/>
+                  </a:lnTo>
+                  <a:lnTo>
+                    <a:pt x="644602" y="1721755"/>
+                  </a:lnTo>
+                  <a:lnTo>
+                    <a:pt x="572980" y="1719208"/>
+                  </a:lnTo>
+                  <a:lnTo>
+                    <a:pt x="501357" y="1716655"/>
+                  </a:lnTo>
+                  <a:lnTo>
+                    <a:pt x="429735" y="1714095"/>
+                  </a:lnTo>
+                  <a:lnTo>
+                    <a:pt x="358112" y="1711528"/>
+                  </a:lnTo>
+                  <a:lnTo>
+                    <a:pt x="286490" y="1708955"/>
+                  </a:lnTo>
+                  <a:lnTo>
+                    <a:pt x="214867" y="1706374"/>
+                  </a:lnTo>
+                  <a:lnTo>
+                    <a:pt x="143245" y="1703787"/>
+                  </a:lnTo>
+                  <a:lnTo>
+                    <a:pt x="71622" y="1701193"/>
+                  </a:lnTo>
+                  <a:lnTo>
+                    <a:pt x="0" y="1698592"/>
                   </a:lnTo>
                   <a:close/>
                 </a:path>
@@ -3676,312 +3676,312 @@
           </p:nvSpPr>
           <p:spPr>
             <a:xfrm>
-              <a:off x="1172049" y="2888054"/>
-              <a:ext cx="7090630" cy="1904826"/>
+              <a:off x="1172049" y="2870245"/>
+              <a:ext cx="7090630" cy="1925535"/>
             </a:xfrm>
             <a:custGeom>
               <a:avLst/>
               <a:pathLst>
-                <a:path w="7090630" h="1904826">
+                <a:path w="7090630" h="1925535">
                   <a:moveTo>
                     <a:pt x="0" y="0"/>
                   </a:moveTo>
                   <a:lnTo>
-                    <a:pt x="71622" y="46474"/>
-                  </a:lnTo>
-                  <a:lnTo>
-                    <a:pt x="143245" y="92140"/>
-                  </a:lnTo>
-                  <a:lnTo>
-                    <a:pt x="214867" y="137011"/>
-                  </a:lnTo>
-                  <a:lnTo>
-                    <a:pt x="286490" y="181100"/>
-                  </a:lnTo>
-                  <a:lnTo>
-                    <a:pt x="358112" y="224422"/>
-                  </a:lnTo>
-                  <a:lnTo>
-                    <a:pt x="429735" y="266989"/>
-                  </a:lnTo>
-                  <a:lnTo>
-                    <a:pt x="501357" y="308815"/>
-                  </a:lnTo>
-                  <a:lnTo>
-                    <a:pt x="572980" y="349913"/>
-                  </a:lnTo>
-                  <a:lnTo>
-                    <a:pt x="644602" y="390295"/>
-                  </a:lnTo>
-                  <a:lnTo>
-                    <a:pt x="716225" y="429975"/>
-                  </a:lnTo>
-                  <a:lnTo>
-                    <a:pt x="787847" y="468963"/>
-                  </a:lnTo>
-                  <a:lnTo>
-                    <a:pt x="859470" y="507272"/>
-                  </a:lnTo>
-                  <a:lnTo>
-                    <a:pt x="931092" y="544915"/>
-                  </a:lnTo>
-                  <a:lnTo>
-                    <a:pt x="1002715" y="581902"/>
-                  </a:lnTo>
-                  <a:lnTo>
-                    <a:pt x="1074337" y="618245"/>
-                  </a:lnTo>
-                  <a:lnTo>
-                    <a:pt x="1145960" y="653955"/>
-                  </a:lnTo>
-                  <a:lnTo>
-                    <a:pt x="1217582" y="689044"/>
-                  </a:lnTo>
-                  <a:lnTo>
-                    <a:pt x="1289205" y="723521"/>
-                  </a:lnTo>
-                  <a:lnTo>
-                    <a:pt x="1360827" y="757398"/>
-                  </a:lnTo>
-                  <a:lnTo>
-                    <a:pt x="1432450" y="790686"/>
-                  </a:lnTo>
-                  <a:lnTo>
-                    <a:pt x="1504073" y="823394"/>
-                  </a:lnTo>
-                  <a:lnTo>
-                    <a:pt x="1575695" y="855532"/>
-                  </a:lnTo>
-                  <a:lnTo>
-                    <a:pt x="1647318" y="887111"/>
-                  </a:lnTo>
-                  <a:lnTo>
-                    <a:pt x="1718940" y="918139"/>
-                  </a:lnTo>
-                  <a:lnTo>
-                    <a:pt x="1790563" y="948628"/>
-                  </a:lnTo>
-                  <a:lnTo>
-                    <a:pt x="1862185" y="978586"/>
-                  </a:lnTo>
-                  <a:lnTo>
-                    <a:pt x="1933808" y="1008022"/>
-                  </a:lnTo>
-                  <a:lnTo>
-                    <a:pt x="2005430" y="1036946"/>
-                  </a:lnTo>
-                  <a:lnTo>
-                    <a:pt x="2077053" y="1065366"/>
-                  </a:lnTo>
-                  <a:lnTo>
-                    <a:pt x="2148675" y="1093291"/>
-                  </a:lnTo>
-                  <a:lnTo>
-                    <a:pt x="2220298" y="1120730"/>
-                  </a:lnTo>
-                  <a:lnTo>
-                    <a:pt x="2291920" y="1147691"/>
-                  </a:lnTo>
-                  <a:lnTo>
-                    <a:pt x="2363543" y="1174183"/>
-                  </a:lnTo>
-                  <a:lnTo>
-                    <a:pt x="2435165" y="1200213"/>
-                  </a:lnTo>
-                  <a:lnTo>
-                    <a:pt x="2506788" y="1225791"/>
-                  </a:lnTo>
-                  <a:lnTo>
-                    <a:pt x="2578410" y="1250923"/>
-                  </a:lnTo>
-                  <a:lnTo>
-                    <a:pt x="2650033" y="1275617"/>
-                  </a:lnTo>
-                  <a:lnTo>
-                    <a:pt x="2721655" y="1299881"/>
-                  </a:lnTo>
-                  <a:lnTo>
-                    <a:pt x="2793278" y="1323723"/>
-                  </a:lnTo>
-                  <a:lnTo>
-                    <a:pt x="2864901" y="1347150"/>
-                  </a:lnTo>
-                  <a:lnTo>
-                    <a:pt x="2936523" y="1370169"/>
-                  </a:lnTo>
-                  <a:lnTo>
-                    <a:pt x="3008146" y="1392787"/>
-                  </a:lnTo>
-                  <a:lnTo>
-                    <a:pt x="3079768" y="1415011"/>
-                  </a:lnTo>
-                  <a:lnTo>
-                    <a:pt x="3151391" y="1436848"/>
-                  </a:lnTo>
-                  <a:lnTo>
-                    <a:pt x="3223013" y="1458306"/>
-                  </a:lnTo>
-                  <a:lnTo>
-                    <a:pt x="3294636" y="1479389"/>
-                  </a:lnTo>
-                  <a:lnTo>
-                    <a:pt x="3366258" y="1500105"/>
-                  </a:lnTo>
-                  <a:lnTo>
-                    <a:pt x="3437881" y="1520461"/>
-                  </a:lnTo>
-                  <a:lnTo>
-                    <a:pt x="3509503" y="1540462"/>
-                  </a:lnTo>
-                  <a:lnTo>
-                    <a:pt x="3581126" y="1560115"/>
-                  </a:lnTo>
-                  <a:lnTo>
-                    <a:pt x="3652748" y="1579426"/>
-                  </a:lnTo>
-                  <a:lnTo>
-                    <a:pt x="3724371" y="1598401"/>
-                  </a:lnTo>
-                  <a:lnTo>
-                    <a:pt x="3795993" y="1617045"/>
-                  </a:lnTo>
-                  <a:lnTo>
-                    <a:pt x="3867616" y="1635365"/>
-                  </a:lnTo>
-                  <a:lnTo>
-                    <a:pt x="3939238" y="1653365"/>
-                  </a:lnTo>
-                  <a:lnTo>
-                    <a:pt x="4010861" y="1671052"/>
-                  </a:lnTo>
-                  <a:lnTo>
-                    <a:pt x="4082483" y="1688432"/>
-                  </a:lnTo>
-                  <a:lnTo>
-                    <a:pt x="4154106" y="1705508"/>
-                  </a:lnTo>
-                  <a:lnTo>
-                    <a:pt x="4225729" y="1722288"/>
-                  </a:lnTo>
-                  <a:lnTo>
-                    <a:pt x="4297351" y="1738775"/>
-                  </a:lnTo>
-                  <a:lnTo>
-                    <a:pt x="4368974" y="1754975"/>
-                  </a:lnTo>
-                  <a:lnTo>
-                    <a:pt x="4440596" y="1770893"/>
-                  </a:lnTo>
-                  <a:lnTo>
-                    <a:pt x="4512219" y="1786534"/>
-                  </a:lnTo>
-                  <a:lnTo>
-                    <a:pt x="4583841" y="1801902"/>
-                  </a:lnTo>
-                  <a:lnTo>
-                    <a:pt x="4655464" y="1817003"/>
-                  </a:lnTo>
-                  <a:lnTo>
-                    <a:pt x="4727086" y="1831841"/>
-                  </a:lnTo>
-                  <a:lnTo>
-                    <a:pt x="4798709" y="1840694"/>
-                  </a:lnTo>
-                  <a:lnTo>
-                    <a:pt x="4870331" y="1842777"/>
-                  </a:lnTo>
-                  <a:lnTo>
-                    <a:pt x="4941954" y="1844855"/>
-                  </a:lnTo>
-                  <a:lnTo>
-                    <a:pt x="5013576" y="1846928"/>
-                  </a:lnTo>
-                  <a:lnTo>
-                    <a:pt x="5085199" y="1848996"/>
-                  </a:lnTo>
-                  <a:lnTo>
-                    <a:pt x="5156821" y="1851058"/>
-                  </a:lnTo>
-                  <a:lnTo>
-                    <a:pt x="5228444" y="1853115"/>
-                  </a:lnTo>
-                  <a:lnTo>
-                    <a:pt x="5300066" y="1855168"/>
-                  </a:lnTo>
-                  <a:lnTo>
-                    <a:pt x="5371689" y="1857214"/>
-                  </a:lnTo>
-                  <a:lnTo>
-                    <a:pt x="5443311" y="1859256"/>
-                  </a:lnTo>
-                  <a:lnTo>
-                    <a:pt x="5514934" y="1861293"/>
-                  </a:lnTo>
-                  <a:lnTo>
-                    <a:pt x="5586557" y="1863324"/>
-                  </a:lnTo>
-                  <a:lnTo>
-                    <a:pt x="5658179" y="1865351"/>
-                  </a:lnTo>
-                  <a:lnTo>
-                    <a:pt x="5729802" y="1867372"/>
-                  </a:lnTo>
-                  <a:lnTo>
-                    <a:pt x="5801424" y="1869388"/>
-                  </a:lnTo>
-                  <a:lnTo>
-                    <a:pt x="5873047" y="1871400"/>
-                  </a:lnTo>
-                  <a:lnTo>
-                    <a:pt x="5944669" y="1873406"/>
-                  </a:lnTo>
-                  <a:lnTo>
-                    <a:pt x="6016292" y="1875407"/>
-                  </a:lnTo>
-                  <a:lnTo>
-                    <a:pt x="6087914" y="1877403"/>
-                  </a:lnTo>
-                  <a:lnTo>
-                    <a:pt x="6159537" y="1879394"/>
-                  </a:lnTo>
-                  <a:lnTo>
-                    <a:pt x="6231159" y="1881380"/>
-                  </a:lnTo>
-                  <a:lnTo>
-                    <a:pt x="6302782" y="1883361"/>
-                  </a:lnTo>
-                  <a:lnTo>
-                    <a:pt x="6374404" y="1885337"/>
-                  </a:lnTo>
-                  <a:lnTo>
-                    <a:pt x="6446027" y="1887308"/>
-                  </a:lnTo>
-                  <a:lnTo>
-                    <a:pt x="6517649" y="1889274"/>
-                  </a:lnTo>
-                  <a:lnTo>
-                    <a:pt x="6589272" y="1891235"/>
-                  </a:lnTo>
-                  <a:lnTo>
-                    <a:pt x="6660894" y="1893191"/>
-                  </a:lnTo>
-                  <a:lnTo>
-                    <a:pt x="6732517" y="1895143"/>
-                  </a:lnTo>
-                  <a:lnTo>
-                    <a:pt x="6804139" y="1897089"/>
-                  </a:lnTo>
-                  <a:lnTo>
-                    <a:pt x="6875762" y="1899031"/>
-                  </a:lnTo>
-                  <a:lnTo>
-                    <a:pt x="6947385" y="1900967"/>
-                  </a:lnTo>
-                  <a:lnTo>
-                    <a:pt x="7019007" y="1902899"/>
-                  </a:lnTo>
-                  <a:lnTo>
-                    <a:pt x="7090630" y="1904826"/>
+                    <a:pt x="71622" y="47048"/>
+                  </a:lnTo>
+                  <a:lnTo>
+                    <a:pt x="143245" y="93273"/>
+                  </a:lnTo>
+                  <a:lnTo>
+                    <a:pt x="214867" y="138689"/>
+                  </a:lnTo>
+                  <a:lnTo>
+                    <a:pt x="286490" y="183309"/>
+                  </a:lnTo>
+                  <a:lnTo>
+                    <a:pt x="358112" y="227148"/>
+                  </a:lnTo>
+                  <a:lnTo>
+                    <a:pt x="429735" y="270220"/>
+                  </a:lnTo>
+                  <a:lnTo>
+                    <a:pt x="501357" y="312537"/>
+                  </a:lnTo>
+                  <a:lnTo>
+                    <a:pt x="572980" y="354113"/>
+                  </a:lnTo>
+                  <a:lnTo>
+                    <a:pt x="644602" y="394962"/>
+                  </a:lnTo>
+                  <a:lnTo>
+                    <a:pt x="716225" y="435095"/>
+                  </a:lnTo>
+                  <a:lnTo>
+                    <a:pt x="787847" y="474525"/>
+                  </a:lnTo>
+                  <a:lnTo>
+                    <a:pt x="859470" y="513265"/>
+                  </a:lnTo>
+                  <a:lnTo>
+                    <a:pt x="931092" y="551327"/>
+                  </a:lnTo>
+                  <a:lnTo>
+                    <a:pt x="1002715" y="588722"/>
+                  </a:lnTo>
+                  <a:lnTo>
+                    <a:pt x="1074337" y="625462"/>
+                  </a:lnTo>
+                  <a:lnTo>
+                    <a:pt x="1145960" y="661559"/>
+                  </a:lnTo>
+                  <a:lnTo>
+                    <a:pt x="1217582" y="697024"/>
+                  </a:lnTo>
+                  <a:lnTo>
+                    <a:pt x="1289205" y="731868"/>
+                  </a:lnTo>
+                  <a:lnTo>
+                    <a:pt x="1360827" y="766102"/>
+                  </a:lnTo>
+                  <a:lnTo>
+                    <a:pt x="1432450" y="799737"/>
+                  </a:lnTo>
+                  <a:lnTo>
+                    <a:pt x="1504073" y="832783"/>
+                  </a:lnTo>
+                  <a:lnTo>
+                    <a:pt x="1575695" y="865249"/>
+                  </a:lnTo>
+                  <a:lnTo>
+                    <a:pt x="1647318" y="897148"/>
+                  </a:lnTo>
+                  <a:lnTo>
+                    <a:pt x="1718940" y="928488"/>
+                  </a:lnTo>
+                  <a:lnTo>
+                    <a:pt x="1790563" y="959279"/>
+                  </a:lnTo>
+                  <a:lnTo>
+                    <a:pt x="1862185" y="989531"/>
+                  </a:lnTo>
+                  <a:lnTo>
+                    <a:pt x="1933808" y="1019253"/>
+                  </a:lnTo>
+                  <a:lnTo>
+                    <a:pt x="2005430" y="1048455"/>
+                  </a:lnTo>
+                  <a:lnTo>
+                    <a:pt x="2077053" y="1077146"/>
+                  </a:lnTo>
+                  <a:lnTo>
+                    <a:pt x="2148675" y="1105334"/>
+                  </a:lnTo>
+                  <a:lnTo>
+                    <a:pt x="2220298" y="1133029"/>
+                  </a:lnTo>
+                  <a:lnTo>
+                    <a:pt x="2291920" y="1160238"/>
+                  </a:lnTo>
+                  <a:lnTo>
+                    <a:pt x="2363543" y="1186972"/>
+                  </a:lnTo>
+                  <a:lnTo>
+                    <a:pt x="2435165" y="1213237"/>
+                  </a:lnTo>
+                  <a:lnTo>
+                    <a:pt x="2506788" y="1239042"/>
+                  </a:lnTo>
+                  <a:lnTo>
+                    <a:pt x="2578410" y="1264396"/>
+                  </a:lnTo>
+                  <a:lnTo>
+                    <a:pt x="2650033" y="1289305"/>
+                  </a:lnTo>
+                  <a:lnTo>
+                    <a:pt x="2721655" y="1313779"/>
+                  </a:lnTo>
+                  <a:lnTo>
+                    <a:pt x="2793278" y="1337823"/>
+                  </a:lnTo>
+                  <a:lnTo>
+                    <a:pt x="2864901" y="1361447"/>
+                  </a:lnTo>
+                  <a:lnTo>
+                    <a:pt x="2936523" y="1384657"/>
+                  </a:lnTo>
+                  <a:lnTo>
+                    <a:pt x="3008146" y="1407461"/>
+                  </a:lnTo>
+                  <a:lnTo>
+                    <a:pt x="3079768" y="1429866"/>
+                  </a:lnTo>
+                  <a:lnTo>
+                    <a:pt x="3151391" y="1451878"/>
+                  </a:lnTo>
+                  <a:lnTo>
+                    <a:pt x="3223013" y="1473505"/>
+                  </a:lnTo>
+                  <a:lnTo>
+                    <a:pt x="3294636" y="1494753"/>
+                  </a:lnTo>
+                  <a:lnTo>
+                    <a:pt x="3366258" y="1515629"/>
+                  </a:lnTo>
+                  <a:lnTo>
+                    <a:pt x="3437881" y="1536139"/>
+                  </a:lnTo>
+                  <a:lnTo>
+                    <a:pt x="3509503" y="1556290"/>
+                  </a:lnTo>
+                  <a:lnTo>
+                    <a:pt x="3581126" y="1576089"/>
+                  </a:lnTo>
+                  <a:lnTo>
+                    <a:pt x="3652748" y="1595541"/>
+                  </a:lnTo>
+                  <a:lnTo>
+                    <a:pt x="3724371" y="1614652"/>
+                  </a:lnTo>
+                  <a:lnTo>
+                    <a:pt x="3795993" y="1633429"/>
+                  </a:lnTo>
+                  <a:lnTo>
+                    <a:pt x="3867616" y="1651877"/>
+                  </a:lnTo>
+                  <a:lnTo>
+                    <a:pt x="3939238" y="1670001"/>
+                  </a:lnTo>
+                  <a:lnTo>
+                    <a:pt x="4010861" y="1687809"/>
+                  </a:lnTo>
+                  <a:lnTo>
+                    <a:pt x="4082483" y="1705304"/>
+                  </a:lnTo>
+                  <a:lnTo>
+                    <a:pt x="4154106" y="1722494"/>
+                  </a:lnTo>
+                  <a:lnTo>
+                    <a:pt x="4225729" y="1739382"/>
+                  </a:lnTo>
+                  <a:lnTo>
+                    <a:pt x="4297351" y="1755975"/>
+                  </a:lnTo>
+                  <a:lnTo>
+                    <a:pt x="4368974" y="1772277"/>
+                  </a:lnTo>
+                  <a:lnTo>
+                    <a:pt x="4440596" y="1788293"/>
+                  </a:lnTo>
+                  <a:lnTo>
+                    <a:pt x="4512219" y="1804030"/>
+                  </a:lnTo>
+                  <a:lnTo>
+                    <a:pt x="4583841" y="1819490"/>
+                  </a:lnTo>
+                  <a:lnTo>
+                    <a:pt x="4655464" y="1834680"/>
+                  </a:lnTo>
+                  <a:lnTo>
+                    <a:pt x="4727086" y="1849604"/>
+                  </a:lnTo>
+                  <a:lnTo>
+                    <a:pt x="4798709" y="1858547"/>
+                  </a:lnTo>
+                  <a:lnTo>
+                    <a:pt x="4870331" y="1860727"/>
+                  </a:lnTo>
+                  <a:lnTo>
+                    <a:pt x="4941954" y="1862901"/>
+                  </a:lnTo>
+                  <a:lnTo>
+                    <a:pt x="5013576" y="1865070"/>
+                  </a:lnTo>
+                  <a:lnTo>
+                    <a:pt x="5085199" y="1867232"/>
+                  </a:lnTo>
+                  <a:lnTo>
+                    <a:pt x="5156821" y="1869390"/>
+                  </a:lnTo>
+                  <a:lnTo>
+                    <a:pt x="5228444" y="1871541"/>
+                  </a:lnTo>
+                  <a:lnTo>
+                    <a:pt x="5300066" y="1873687"/>
+                  </a:lnTo>
+                  <a:lnTo>
+                    <a:pt x="5371689" y="1875827"/>
+                  </a:lnTo>
+                  <a:lnTo>
+                    <a:pt x="5443311" y="1877961"/>
+                  </a:lnTo>
+                  <a:lnTo>
+                    <a:pt x="5514934" y="1880090"/>
+                  </a:lnTo>
+                  <a:lnTo>
+                    <a:pt x="5586557" y="1882214"/>
+                  </a:lnTo>
+                  <a:lnTo>
+                    <a:pt x="5658179" y="1884331"/>
+                  </a:lnTo>
+                  <a:lnTo>
+                    <a:pt x="5729802" y="1886444"/>
+                  </a:lnTo>
+                  <a:lnTo>
+                    <a:pt x="5801424" y="1888550"/>
+                  </a:lnTo>
+                  <a:lnTo>
+                    <a:pt x="5873047" y="1890651"/>
+                  </a:lnTo>
+                  <a:lnTo>
+                    <a:pt x="5944669" y="1892747"/>
+                  </a:lnTo>
+                  <a:lnTo>
+                    <a:pt x="6016292" y="1894837"/>
+                  </a:lnTo>
+                  <a:lnTo>
+                    <a:pt x="6087914" y="1896921"/>
+                  </a:lnTo>
+                  <a:lnTo>
+                    <a:pt x="6159537" y="1899000"/>
+                  </a:lnTo>
+                  <a:lnTo>
+                    <a:pt x="6231159" y="1901074"/>
+                  </a:lnTo>
+                  <a:lnTo>
+                    <a:pt x="6302782" y="1903142"/>
+                  </a:lnTo>
+                  <a:lnTo>
+                    <a:pt x="6374404" y="1905204"/>
+                  </a:lnTo>
+                  <a:lnTo>
+                    <a:pt x="6446027" y="1907262"/>
+                  </a:lnTo>
+                  <a:lnTo>
+                    <a:pt x="6517649" y="1909313"/>
+                  </a:lnTo>
+                  <a:lnTo>
+                    <a:pt x="6589272" y="1911360"/>
+                  </a:lnTo>
+                  <a:lnTo>
+                    <a:pt x="6660894" y="1913401"/>
+                  </a:lnTo>
+                  <a:lnTo>
+                    <a:pt x="6732517" y="1915436"/>
+                  </a:lnTo>
+                  <a:lnTo>
+                    <a:pt x="6804139" y="1917467"/>
+                  </a:lnTo>
+                  <a:lnTo>
+                    <a:pt x="6875762" y="1919492"/>
+                  </a:lnTo>
+                  <a:lnTo>
+                    <a:pt x="6947385" y="1921511"/>
+                  </a:lnTo>
+                  <a:lnTo>
+                    <a:pt x="7019007" y="1923526"/>
+                  </a:lnTo>
+                  <a:lnTo>
+                    <a:pt x="7090630" y="1925535"/>
                   </a:lnTo>
                 </a:path>
               </a:pathLst>
@@ -4001,309 +4001,309 @@
           </p:nvSpPr>
           <p:spPr>
             <a:xfrm>
-              <a:off x="1172049" y="4576511"/>
-              <a:ext cx="7090630" cy="511737"/>
+              <a:off x="1172049" y="4568838"/>
+              <a:ext cx="7090630" cy="520929"/>
             </a:xfrm>
             <a:custGeom>
               <a:avLst/>
               <a:pathLst>
-                <a:path w="7090630" h="511737">
+                <a:path w="7090630" h="520929">
                   <a:moveTo>
-                    <a:pt x="7090630" y="511737"/>
+                    <a:pt x="7090630" y="520929"/>
                   </a:moveTo>
                   <a:lnTo>
-                    <a:pt x="7019007" y="503427"/>
-                  </a:lnTo>
-                  <a:lnTo>
-                    <a:pt x="6947385" y="494969"/>
-                  </a:lnTo>
-                  <a:lnTo>
-                    <a:pt x="6875762" y="486361"/>
-                  </a:lnTo>
-                  <a:lnTo>
-                    <a:pt x="6804139" y="477600"/>
-                  </a:lnTo>
-                  <a:lnTo>
-                    <a:pt x="6732517" y="468685"/>
-                  </a:lnTo>
-                  <a:lnTo>
-                    <a:pt x="6660894" y="459611"/>
-                  </a:lnTo>
-                  <a:lnTo>
-                    <a:pt x="6589272" y="450377"/>
-                  </a:lnTo>
-                  <a:lnTo>
-                    <a:pt x="6517649" y="440979"/>
-                  </a:lnTo>
-                  <a:lnTo>
-                    <a:pt x="6446027" y="431414"/>
-                  </a:lnTo>
-                  <a:lnTo>
-                    <a:pt x="6374404" y="421680"/>
-                  </a:lnTo>
-                  <a:lnTo>
-                    <a:pt x="6302782" y="411773"/>
-                  </a:lnTo>
-                  <a:lnTo>
-                    <a:pt x="6231159" y="401691"/>
-                  </a:lnTo>
-                  <a:lnTo>
-                    <a:pt x="6159537" y="391430"/>
-                  </a:lnTo>
-                  <a:lnTo>
-                    <a:pt x="6087914" y="380988"/>
-                  </a:lnTo>
-                  <a:lnTo>
-                    <a:pt x="6016292" y="370360"/>
-                  </a:lnTo>
-                  <a:lnTo>
-                    <a:pt x="5944669" y="359544"/>
-                  </a:lnTo>
-                  <a:lnTo>
-                    <a:pt x="5873047" y="348537"/>
-                  </a:lnTo>
-                  <a:lnTo>
-                    <a:pt x="5801424" y="337334"/>
-                  </a:lnTo>
-                  <a:lnTo>
-                    <a:pt x="5729802" y="325933"/>
-                  </a:lnTo>
-                  <a:lnTo>
-                    <a:pt x="5658179" y="314330"/>
-                  </a:lnTo>
-                  <a:lnTo>
-                    <a:pt x="5586557" y="302521"/>
-                  </a:lnTo>
-                  <a:lnTo>
-                    <a:pt x="5514934" y="290503"/>
-                  </a:lnTo>
-                  <a:lnTo>
-                    <a:pt x="5443311" y="278272"/>
-                  </a:lnTo>
-                  <a:lnTo>
-                    <a:pt x="5371689" y="265824"/>
-                  </a:lnTo>
-                  <a:lnTo>
-                    <a:pt x="5300066" y="253155"/>
-                  </a:lnTo>
-                  <a:lnTo>
-                    <a:pt x="5228444" y="240263"/>
-                  </a:lnTo>
-                  <a:lnTo>
-                    <a:pt x="5156821" y="227141"/>
-                  </a:lnTo>
-                  <a:lnTo>
-                    <a:pt x="5085199" y="213787"/>
-                  </a:lnTo>
-                  <a:lnTo>
-                    <a:pt x="5013576" y="200197"/>
-                  </a:lnTo>
-                  <a:lnTo>
-                    <a:pt x="4941954" y="186366"/>
-                  </a:lnTo>
-                  <a:lnTo>
-                    <a:pt x="4870331" y="172289"/>
-                  </a:lnTo>
-                  <a:lnTo>
-                    <a:pt x="4798709" y="157964"/>
-                  </a:lnTo>
-                  <a:lnTo>
-                    <a:pt x="4727086" y="150148"/>
-                  </a:lnTo>
-                  <a:lnTo>
-                    <a:pt x="4655464" y="148054"/>
-                  </a:lnTo>
-                  <a:lnTo>
-                    <a:pt x="4583841" y="145955"/>
-                  </a:lnTo>
-                  <a:lnTo>
-                    <a:pt x="4512219" y="143851"/>
-                  </a:lnTo>
-                  <a:lnTo>
-                    <a:pt x="4440596" y="141741"/>
-                  </a:lnTo>
-                  <a:lnTo>
-                    <a:pt x="4368974" y="139626"/>
-                  </a:lnTo>
-                  <a:lnTo>
-                    <a:pt x="4297351" y="137506"/>
-                  </a:lnTo>
-                  <a:lnTo>
-                    <a:pt x="4225729" y="135380"/>
-                  </a:lnTo>
-                  <a:lnTo>
-                    <a:pt x="4154106" y="133249"/>
-                  </a:lnTo>
-                  <a:lnTo>
-                    <a:pt x="4082483" y="131113"/>
-                  </a:lnTo>
-                  <a:lnTo>
-                    <a:pt x="4010861" y="128971"/>
-                  </a:lnTo>
-                  <a:lnTo>
-                    <a:pt x="3939238" y="126824"/>
-                  </a:lnTo>
-                  <a:lnTo>
-                    <a:pt x="3867616" y="124671"/>
-                  </a:lnTo>
-                  <a:lnTo>
-                    <a:pt x="3795993" y="122513"/>
-                  </a:lnTo>
-                  <a:lnTo>
-                    <a:pt x="3724371" y="120349"/>
-                  </a:lnTo>
-                  <a:lnTo>
-                    <a:pt x="3652748" y="118180"/>
-                  </a:lnTo>
-                  <a:lnTo>
-                    <a:pt x="3581126" y="116006"/>
-                  </a:lnTo>
-                  <a:lnTo>
-                    <a:pt x="3509503" y="113826"/>
-                  </a:lnTo>
-                  <a:lnTo>
-                    <a:pt x="3437881" y="111641"/>
-                  </a:lnTo>
-                  <a:lnTo>
-                    <a:pt x="3366258" y="109450"/>
-                  </a:lnTo>
-                  <a:lnTo>
-                    <a:pt x="3294636" y="107253"/>
-                  </a:lnTo>
-                  <a:lnTo>
-                    <a:pt x="3223013" y="105051"/>
-                  </a:lnTo>
-                  <a:lnTo>
-                    <a:pt x="3151391" y="102844"/>
-                  </a:lnTo>
-                  <a:lnTo>
-                    <a:pt x="3079768" y="100631"/>
-                  </a:lnTo>
-                  <a:lnTo>
-                    <a:pt x="3008146" y="98412"/>
-                  </a:lnTo>
-                  <a:lnTo>
-                    <a:pt x="2936523" y="96188"/>
-                  </a:lnTo>
-                  <a:lnTo>
-                    <a:pt x="2864901" y="93958"/>
-                  </a:lnTo>
-                  <a:lnTo>
-                    <a:pt x="2793278" y="91723"/>
-                  </a:lnTo>
-                  <a:lnTo>
-                    <a:pt x="2721655" y="89481"/>
-                  </a:lnTo>
-                  <a:lnTo>
-                    <a:pt x="2650033" y="87235"/>
-                  </a:lnTo>
-                  <a:lnTo>
-                    <a:pt x="2578410" y="84982"/>
-                  </a:lnTo>
-                  <a:lnTo>
-                    <a:pt x="2506788" y="82724"/>
-                  </a:lnTo>
-                  <a:lnTo>
-                    <a:pt x="2435165" y="80460"/>
-                  </a:lnTo>
-                  <a:lnTo>
-                    <a:pt x="2363543" y="78191"/>
-                  </a:lnTo>
-                  <a:lnTo>
-                    <a:pt x="2291920" y="75916"/>
-                  </a:lnTo>
-                  <a:lnTo>
-                    <a:pt x="2220298" y="73635"/>
-                  </a:lnTo>
-                  <a:lnTo>
-                    <a:pt x="2148675" y="71348"/>
-                  </a:lnTo>
-                  <a:lnTo>
-                    <a:pt x="2077053" y="69055"/>
-                  </a:lnTo>
-                  <a:lnTo>
-                    <a:pt x="2005430" y="66757"/>
-                  </a:lnTo>
-                  <a:lnTo>
-                    <a:pt x="1933808" y="64453"/>
-                  </a:lnTo>
-                  <a:lnTo>
-                    <a:pt x="1862185" y="62143"/>
-                  </a:lnTo>
-                  <a:lnTo>
-                    <a:pt x="1790563" y="59828"/>
-                  </a:lnTo>
-                  <a:lnTo>
-                    <a:pt x="1718940" y="57506"/>
-                  </a:lnTo>
-                  <a:lnTo>
-                    <a:pt x="1647318" y="55179"/>
-                  </a:lnTo>
-                  <a:lnTo>
-                    <a:pt x="1575695" y="52845"/>
-                  </a:lnTo>
-                  <a:lnTo>
-                    <a:pt x="1504073" y="50506"/>
-                  </a:lnTo>
-                  <a:lnTo>
-                    <a:pt x="1432450" y="48161"/>
-                  </a:lnTo>
-                  <a:lnTo>
-                    <a:pt x="1360827" y="45810"/>
-                  </a:lnTo>
-                  <a:lnTo>
-                    <a:pt x="1289205" y="43454"/>
-                  </a:lnTo>
-                  <a:lnTo>
-                    <a:pt x="1217582" y="41091"/>
-                  </a:lnTo>
-                  <a:lnTo>
-                    <a:pt x="1145960" y="38722"/>
-                  </a:lnTo>
-                  <a:lnTo>
-                    <a:pt x="1074337" y="36347"/>
-                  </a:lnTo>
-                  <a:lnTo>
-                    <a:pt x="1002715" y="33967"/>
-                  </a:lnTo>
-                  <a:lnTo>
-                    <a:pt x="931092" y="31580"/>
-                  </a:lnTo>
-                  <a:lnTo>
-                    <a:pt x="859470" y="29187"/>
-                  </a:lnTo>
-                  <a:lnTo>
-                    <a:pt x="787847" y="26788"/>
-                  </a:lnTo>
-                  <a:lnTo>
-                    <a:pt x="716225" y="24384"/>
-                  </a:lnTo>
-                  <a:lnTo>
-                    <a:pt x="644602" y="21973"/>
-                  </a:lnTo>
-                  <a:lnTo>
-                    <a:pt x="572980" y="19556"/>
-                  </a:lnTo>
-                  <a:lnTo>
-                    <a:pt x="501357" y="17133"/>
-                  </a:lnTo>
-                  <a:lnTo>
-                    <a:pt x="429735" y="14704"/>
-                  </a:lnTo>
-                  <a:lnTo>
-                    <a:pt x="358112" y="12268"/>
-                  </a:lnTo>
-                  <a:lnTo>
-                    <a:pt x="286490" y="9827"/>
-                  </a:lnTo>
-                  <a:lnTo>
-                    <a:pt x="214867" y="7379"/>
-                  </a:lnTo>
-                  <a:lnTo>
-                    <a:pt x="143245" y="4926"/>
-                  </a:lnTo>
-                  <a:lnTo>
-                    <a:pt x="71622" y="2466"/>
+                    <a:pt x="7019007" y="512598"/>
+                  </a:lnTo>
+                  <a:lnTo>
+                    <a:pt x="6947385" y="504118"/>
+                  </a:lnTo>
+                  <a:lnTo>
+                    <a:pt x="6875762" y="495487"/>
+                  </a:lnTo>
+                  <a:lnTo>
+                    <a:pt x="6804139" y="486702"/>
+                  </a:lnTo>
+                  <a:lnTo>
+                    <a:pt x="6732517" y="477761"/>
+                  </a:lnTo>
+                  <a:lnTo>
+                    <a:pt x="6660894" y="468660"/>
+                  </a:lnTo>
+                  <a:lnTo>
+                    <a:pt x="6589272" y="459397"/>
+                  </a:lnTo>
+                  <a:lnTo>
+                    <a:pt x="6517649" y="449969"/>
+                  </a:lnTo>
+                  <a:lnTo>
+                    <a:pt x="6446027" y="440373"/>
+                  </a:lnTo>
+                  <a:lnTo>
+                    <a:pt x="6374404" y="430606"/>
+                  </a:lnTo>
+                  <a:lnTo>
+                    <a:pt x="6302782" y="420665"/>
+                  </a:lnTo>
+                  <a:lnTo>
+                    <a:pt x="6231159" y="410547"/>
+                  </a:lnTo>
+                  <a:lnTo>
+                    <a:pt x="6159537" y="400248"/>
+                  </a:lnTo>
+                  <a:lnTo>
+                    <a:pt x="6087914" y="389766"/>
+                  </a:lnTo>
+                  <a:lnTo>
+                    <a:pt x="6016292" y="379097"/>
+                  </a:lnTo>
+                  <a:lnTo>
+                    <a:pt x="5944669" y="368238"/>
+                  </a:lnTo>
+                  <a:lnTo>
+                    <a:pt x="5873047" y="357186"/>
+                  </a:lnTo>
+                  <a:lnTo>
+                    <a:pt x="5801424" y="345936"/>
+                  </a:lnTo>
+                  <a:lnTo>
+                    <a:pt x="5729802" y="334486"/>
+                  </a:lnTo>
+                  <a:lnTo>
+                    <a:pt x="5658179" y="322832"/>
+                  </a:lnTo>
+                  <a:lnTo>
+                    <a:pt x="5586557" y="310970"/>
+                  </a:lnTo>
+                  <a:lnTo>
+                    <a:pt x="5514934" y="298897"/>
+                  </a:lnTo>
+                  <a:lnTo>
+                    <a:pt x="5443311" y="286608"/>
+                  </a:lnTo>
+                  <a:lnTo>
+                    <a:pt x="5371689" y="274101"/>
+                  </a:lnTo>
+                  <a:lnTo>
+                    <a:pt x="5300066" y="261371"/>
+                  </a:lnTo>
+                  <a:lnTo>
+                    <a:pt x="5228444" y="248413"/>
+                  </a:lnTo>
+                  <a:lnTo>
+                    <a:pt x="5156821" y="235225"/>
+                  </a:lnTo>
+                  <a:lnTo>
+                    <a:pt x="5085199" y="221802"/>
+                  </a:lnTo>
+                  <a:lnTo>
+                    <a:pt x="5013576" y="208140"/>
+                  </a:lnTo>
+                  <a:lnTo>
+                    <a:pt x="4941954" y="194234"/>
+                  </a:lnTo>
+                  <a:lnTo>
+                    <a:pt x="4870331" y="180080"/>
+                  </a:lnTo>
+                  <a:lnTo>
+                    <a:pt x="4798709" y="165674"/>
+                  </a:lnTo>
+                  <a:lnTo>
+                    <a:pt x="4727086" y="157769"/>
+                  </a:lnTo>
+                  <a:lnTo>
+                    <a:pt x="4655464" y="155577"/>
+                  </a:lnTo>
+                  <a:lnTo>
+                    <a:pt x="4583841" y="153380"/>
+                  </a:lnTo>
+                  <a:lnTo>
+                    <a:pt x="4512219" y="151177"/>
+                  </a:lnTo>
+                  <a:lnTo>
+                    <a:pt x="4440596" y="148968"/>
+                  </a:lnTo>
+                  <a:lnTo>
+                    <a:pt x="4368974" y="146753"/>
+                  </a:lnTo>
+                  <a:lnTo>
+                    <a:pt x="4297351" y="144533"/>
+                  </a:lnTo>
+                  <a:lnTo>
+                    <a:pt x="4225729" y="142306"/>
+                  </a:lnTo>
+                  <a:lnTo>
+                    <a:pt x="4154106" y="140074"/>
+                  </a:lnTo>
+                  <a:lnTo>
+                    <a:pt x="4082483" y="137836"/>
+                  </a:lnTo>
+                  <a:lnTo>
+                    <a:pt x="4010861" y="135592"/>
+                  </a:lnTo>
+                  <a:lnTo>
+                    <a:pt x="3939238" y="133342"/>
+                  </a:lnTo>
+                  <a:lnTo>
+                    <a:pt x="3867616" y="131086"/>
+                  </a:lnTo>
+                  <a:lnTo>
+                    <a:pt x="3795993" y="128824"/>
+                  </a:lnTo>
+                  <a:lnTo>
+                    <a:pt x="3724371" y="126556"/>
+                  </a:lnTo>
+                  <a:lnTo>
+                    <a:pt x="3652748" y="124282"/>
+                  </a:lnTo>
+                  <a:lnTo>
+                    <a:pt x="3581126" y="122002"/>
+                  </a:lnTo>
+                  <a:lnTo>
+                    <a:pt x="3509503" y="119716"/>
+                  </a:lnTo>
+                  <a:lnTo>
+                    <a:pt x="3437881" y="117424"/>
+                  </a:lnTo>
+                  <a:lnTo>
+                    <a:pt x="3366258" y="115127"/>
+                  </a:lnTo>
+                  <a:lnTo>
+                    <a:pt x="3294636" y="112823"/>
+                  </a:lnTo>
+                  <a:lnTo>
+                    <a:pt x="3223013" y="110512"/>
+                  </a:lnTo>
+                  <a:lnTo>
+                    <a:pt x="3151391" y="108196"/>
+                  </a:lnTo>
+                  <a:lnTo>
+                    <a:pt x="3079768" y="105874"/>
+                  </a:lnTo>
+                  <a:lnTo>
+                    <a:pt x="3008146" y="103546"/>
+                  </a:lnTo>
+                  <a:lnTo>
+                    <a:pt x="2936523" y="101211"/>
+                  </a:lnTo>
+                  <a:lnTo>
+                    <a:pt x="2864901" y="98870"/>
+                  </a:lnTo>
+                  <a:lnTo>
+                    <a:pt x="2793278" y="96523"/>
+                  </a:lnTo>
+                  <a:lnTo>
+                    <a:pt x="2721655" y="94170"/>
+                  </a:lnTo>
+                  <a:lnTo>
+                    <a:pt x="2650033" y="91811"/>
+                  </a:lnTo>
+                  <a:lnTo>
+                    <a:pt x="2578410" y="89446"/>
+                  </a:lnTo>
+                  <a:lnTo>
+                    <a:pt x="2506788" y="87074"/>
+                  </a:lnTo>
+                  <a:lnTo>
+                    <a:pt x="2435165" y="84696"/>
+                  </a:lnTo>
+                  <a:lnTo>
+                    <a:pt x="2363543" y="82311"/>
+                  </a:lnTo>
+                  <a:lnTo>
+                    <a:pt x="2291920" y="79921"/>
+                  </a:lnTo>
+                  <a:lnTo>
+                    <a:pt x="2220298" y="77524"/>
+                  </a:lnTo>
+                  <a:lnTo>
+                    <a:pt x="2148675" y="75121"/>
+                  </a:lnTo>
+                  <a:lnTo>
+                    <a:pt x="2077053" y="72711"/>
+                  </a:lnTo>
+                  <a:lnTo>
+                    <a:pt x="2005430" y="70295"/>
+                  </a:lnTo>
+                  <a:lnTo>
+                    <a:pt x="1933808" y="67873"/>
+                  </a:lnTo>
+                  <a:lnTo>
+                    <a:pt x="1862185" y="65444"/>
+                  </a:lnTo>
+                  <a:lnTo>
+                    <a:pt x="1790563" y="63009"/>
+                  </a:lnTo>
+                  <a:lnTo>
+                    <a:pt x="1718940" y="60568"/>
+                  </a:lnTo>
+                  <a:lnTo>
+                    <a:pt x="1647318" y="58120"/>
+                  </a:lnTo>
+                  <a:lnTo>
+                    <a:pt x="1575695" y="55665"/>
+                  </a:lnTo>
+                  <a:lnTo>
+                    <a:pt x="1504073" y="53205"/>
+                  </a:lnTo>
+                  <a:lnTo>
+                    <a:pt x="1432450" y="50737"/>
+                  </a:lnTo>
+                  <a:lnTo>
+                    <a:pt x="1360827" y="48263"/>
+                  </a:lnTo>
+                  <a:lnTo>
+                    <a:pt x="1289205" y="45783"/>
+                  </a:lnTo>
+                  <a:lnTo>
+                    <a:pt x="1217582" y="43296"/>
+                  </a:lnTo>
+                  <a:lnTo>
+                    <a:pt x="1145960" y="40802"/>
+                  </a:lnTo>
+                  <a:lnTo>
+                    <a:pt x="1074337" y="38302"/>
+                  </a:lnTo>
+                  <a:lnTo>
+                    <a:pt x="1002715" y="35796"/>
+                  </a:lnTo>
+                  <a:lnTo>
+                    <a:pt x="931092" y="33282"/>
+                  </a:lnTo>
+                  <a:lnTo>
+                    <a:pt x="859470" y="30762"/>
+                  </a:lnTo>
+                  <a:lnTo>
+                    <a:pt x="787847" y="28236"/>
+                  </a:lnTo>
+                  <a:lnTo>
+                    <a:pt x="716225" y="25703"/>
+                  </a:lnTo>
+                  <a:lnTo>
+                    <a:pt x="644602" y="23163"/>
+                  </a:lnTo>
+                  <a:lnTo>
+                    <a:pt x="572980" y="20616"/>
+                  </a:lnTo>
+                  <a:lnTo>
+                    <a:pt x="501357" y="18063"/>
+                  </a:lnTo>
+                  <a:lnTo>
+                    <a:pt x="429735" y="15503"/>
+                  </a:lnTo>
+                  <a:lnTo>
+                    <a:pt x="358112" y="12936"/>
+                  </a:lnTo>
+                  <a:lnTo>
+                    <a:pt x="286490" y="10362"/>
+                  </a:lnTo>
+                  <a:lnTo>
+                    <a:pt x="214867" y="7782"/>
+                  </a:lnTo>
+                  <a:lnTo>
+                    <a:pt x="143245" y="5194"/>
+                  </a:lnTo>
+                  <a:lnTo>
+                    <a:pt x="71622" y="2600"/>
                   </a:lnTo>
                   <a:lnTo>
                     <a:pt x="0" y="0"/>
@@ -4326,312 +4326,312 @@
           </p:nvSpPr>
           <p:spPr>
             <a:xfrm>
-              <a:off x="1172049" y="3939293"/>
-              <a:ext cx="7090630" cy="1019216"/>
+              <a:off x="1172049" y="3927567"/>
+              <a:ext cx="7090630" cy="1033048"/>
             </a:xfrm>
             <a:custGeom>
               <a:avLst/>
               <a:pathLst>
-                <a:path w="7090630" h="1019216">
+                <a:path w="7090630" h="1033048">
                   <a:moveTo>
                     <a:pt x="0" y="0"/>
                   </a:moveTo>
                   <a:lnTo>
-                    <a:pt x="71622" y="16165"/>
-                  </a:lnTo>
-                  <a:lnTo>
-                    <a:pt x="143245" y="32168"/>
-                  </a:lnTo>
-                  <a:lnTo>
-                    <a:pt x="214867" y="48012"/>
-                  </a:lnTo>
-                  <a:lnTo>
-                    <a:pt x="286490" y="63697"/>
-                  </a:lnTo>
-                  <a:lnTo>
-                    <a:pt x="358112" y="79226"/>
-                  </a:lnTo>
-                  <a:lnTo>
-                    <a:pt x="429735" y="94600"/>
-                  </a:lnTo>
-                  <a:lnTo>
-                    <a:pt x="501357" y="109820"/>
-                  </a:lnTo>
-                  <a:lnTo>
-                    <a:pt x="572980" y="124888"/>
-                  </a:lnTo>
-                  <a:lnTo>
-                    <a:pt x="644602" y="139805"/>
-                  </a:lnTo>
-                  <a:lnTo>
-                    <a:pt x="716225" y="154573"/>
-                  </a:lnTo>
-                  <a:lnTo>
-                    <a:pt x="787847" y="169194"/>
-                  </a:lnTo>
-                  <a:lnTo>
-                    <a:pt x="859470" y="183669"/>
-                  </a:lnTo>
-                  <a:lnTo>
-                    <a:pt x="931092" y="197999"/>
-                  </a:lnTo>
-                  <a:lnTo>
-                    <a:pt x="1002715" y="212186"/>
-                  </a:lnTo>
-                  <a:lnTo>
-                    <a:pt x="1074337" y="226231"/>
-                  </a:lnTo>
-                  <a:lnTo>
-                    <a:pt x="1145960" y="240136"/>
-                  </a:lnTo>
-                  <a:lnTo>
-                    <a:pt x="1217582" y="253902"/>
-                  </a:lnTo>
-                  <a:lnTo>
-                    <a:pt x="1289205" y="267530"/>
-                  </a:lnTo>
-                  <a:lnTo>
-                    <a:pt x="1360827" y="281022"/>
-                  </a:lnTo>
-                  <a:lnTo>
-                    <a:pt x="1432450" y="294380"/>
-                  </a:lnTo>
-                  <a:lnTo>
-                    <a:pt x="1504073" y="307604"/>
-                  </a:lnTo>
-                  <a:lnTo>
-                    <a:pt x="1575695" y="320696"/>
-                  </a:lnTo>
-                  <a:lnTo>
-                    <a:pt x="1647318" y="333657"/>
-                  </a:lnTo>
-                  <a:lnTo>
-                    <a:pt x="1718940" y="346488"/>
-                  </a:lnTo>
-                  <a:lnTo>
-                    <a:pt x="1790563" y="359191"/>
-                  </a:lnTo>
-                  <a:lnTo>
-                    <a:pt x="1862185" y="371768"/>
-                  </a:lnTo>
-                  <a:lnTo>
-                    <a:pt x="1933808" y="384219"/>
-                  </a:lnTo>
-                  <a:lnTo>
-                    <a:pt x="2005430" y="396545"/>
-                  </a:lnTo>
-                  <a:lnTo>
-                    <a:pt x="2077053" y="408748"/>
-                  </a:lnTo>
-                  <a:lnTo>
-                    <a:pt x="2148675" y="420829"/>
-                  </a:lnTo>
-                  <a:lnTo>
-                    <a:pt x="2220298" y="432790"/>
-                  </a:lnTo>
-                  <a:lnTo>
-                    <a:pt x="2291920" y="444631"/>
-                  </a:lnTo>
-                  <a:lnTo>
-                    <a:pt x="2363543" y="456354"/>
-                  </a:lnTo>
-                  <a:lnTo>
-                    <a:pt x="2435165" y="467960"/>
-                  </a:lnTo>
-                  <a:lnTo>
-                    <a:pt x="2506788" y="479449"/>
-                  </a:lnTo>
-                  <a:lnTo>
-                    <a:pt x="2578410" y="490824"/>
-                  </a:lnTo>
-                  <a:lnTo>
-                    <a:pt x="2650033" y="502086"/>
-                  </a:lnTo>
-                  <a:lnTo>
-                    <a:pt x="2721655" y="513234"/>
-                  </a:lnTo>
-                  <a:lnTo>
-                    <a:pt x="2793278" y="524272"/>
-                  </a:lnTo>
-                  <a:lnTo>
-                    <a:pt x="2864901" y="535199"/>
-                  </a:lnTo>
-                  <a:lnTo>
-                    <a:pt x="2936523" y="546017"/>
-                  </a:lnTo>
-                  <a:lnTo>
-                    <a:pt x="3008146" y="556726"/>
-                  </a:lnTo>
-                  <a:lnTo>
-                    <a:pt x="3079768" y="567329"/>
-                  </a:lnTo>
-                  <a:lnTo>
-                    <a:pt x="3151391" y="577826"/>
-                  </a:lnTo>
-                  <a:lnTo>
-                    <a:pt x="3223013" y="588218"/>
-                  </a:lnTo>
-                  <a:lnTo>
-                    <a:pt x="3294636" y="598506"/>
-                  </a:lnTo>
-                  <a:lnTo>
-                    <a:pt x="3366258" y="608692"/>
-                  </a:lnTo>
-                  <a:lnTo>
-                    <a:pt x="3437881" y="618775"/>
-                  </a:lnTo>
-                  <a:lnTo>
-                    <a:pt x="3509503" y="628758"/>
-                  </a:lnTo>
-                  <a:lnTo>
-                    <a:pt x="3581126" y="638642"/>
-                  </a:lnTo>
-                  <a:lnTo>
-                    <a:pt x="3652748" y="648426"/>
-                  </a:lnTo>
-                  <a:lnTo>
-                    <a:pt x="3724371" y="658113"/>
-                  </a:lnTo>
-                  <a:lnTo>
-                    <a:pt x="3795993" y="667702"/>
-                  </a:lnTo>
-                  <a:lnTo>
-                    <a:pt x="3867616" y="677197"/>
-                  </a:lnTo>
-                  <a:lnTo>
-                    <a:pt x="3939238" y="686596"/>
-                  </a:lnTo>
-                  <a:lnTo>
-                    <a:pt x="4010861" y="695901"/>
-                  </a:lnTo>
-                  <a:lnTo>
-                    <a:pt x="4082483" y="705113"/>
-                  </a:lnTo>
-                  <a:lnTo>
-                    <a:pt x="4154106" y="714234"/>
-                  </a:lnTo>
-                  <a:lnTo>
-                    <a:pt x="4225729" y="723263"/>
-                  </a:lnTo>
-                  <a:lnTo>
-                    <a:pt x="4297351" y="732202"/>
-                  </a:lnTo>
-                  <a:lnTo>
-                    <a:pt x="4368974" y="741051"/>
-                  </a:lnTo>
-                  <a:lnTo>
-                    <a:pt x="4440596" y="749813"/>
-                  </a:lnTo>
-                  <a:lnTo>
-                    <a:pt x="4512219" y="758486"/>
-                  </a:lnTo>
-                  <a:lnTo>
-                    <a:pt x="4583841" y="767073"/>
-                  </a:lnTo>
-                  <a:lnTo>
-                    <a:pt x="4655464" y="775575"/>
-                  </a:lnTo>
-                  <a:lnTo>
-                    <a:pt x="4727086" y="783991"/>
-                  </a:lnTo>
-                  <a:lnTo>
-                    <a:pt x="4798709" y="792323"/>
-                  </a:lnTo>
-                  <a:lnTo>
-                    <a:pt x="4870331" y="800572"/>
-                  </a:lnTo>
-                  <a:lnTo>
-                    <a:pt x="4941954" y="808739"/>
-                  </a:lnTo>
-                  <a:lnTo>
-                    <a:pt x="5013576" y="816824"/>
-                  </a:lnTo>
-                  <a:lnTo>
-                    <a:pt x="5085199" y="824828"/>
-                  </a:lnTo>
-                  <a:lnTo>
-                    <a:pt x="5156821" y="832752"/>
-                  </a:lnTo>
-                  <a:lnTo>
-                    <a:pt x="5228444" y="840597"/>
-                  </a:lnTo>
-                  <a:lnTo>
-                    <a:pt x="5300066" y="848364"/>
-                  </a:lnTo>
-                  <a:lnTo>
-                    <a:pt x="5371689" y="856053"/>
-                  </a:lnTo>
-                  <a:lnTo>
-                    <a:pt x="5443311" y="863665"/>
-                  </a:lnTo>
-                  <a:lnTo>
-                    <a:pt x="5514934" y="871201"/>
-                  </a:lnTo>
-                  <a:lnTo>
-                    <a:pt x="5586557" y="878662"/>
-                  </a:lnTo>
-                  <a:lnTo>
-                    <a:pt x="5658179" y="886048"/>
-                  </a:lnTo>
-                  <a:lnTo>
-                    <a:pt x="5729802" y="893361"/>
-                  </a:lnTo>
-                  <a:lnTo>
-                    <a:pt x="5801424" y="900600"/>
-                  </a:lnTo>
-                  <a:lnTo>
-                    <a:pt x="5873047" y="907768"/>
-                  </a:lnTo>
-                  <a:lnTo>
-                    <a:pt x="5944669" y="914863"/>
-                  </a:lnTo>
-                  <a:lnTo>
-                    <a:pt x="6016292" y="921888"/>
-                  </a:lnTo>
-                  <a:lnTo>
-                    <a:pt x="6087914" y="928842"/>
-                  </a:lnTo>
-                  <a:lnTo>
-                    <a:pt x="6159537" y="935727"/>
-                  </a:lnTo>
-                  <a:lnTo>
-                    <a:pt x="6231159" y="942543"/>
-                  </a:lnTo>
-                  <a:lnTo>
-                    <a:pt x="6302782" y="949292"/>
-                  </a:lnTo>
-                  <a:lnTo>
-                    <a:pt x="6374404" y="955972"/>
-                  </a:lnTo>
-                  <a:lnTo>
-                    <a:pt x="6446027" y="962586"/>
-                  </a:lnTo>
-                  <a:lnTo>
-                    <a:pt x="6517649" y="969134"/>
-                  </a:lnTo>
-                  <a:lnTo>
-                    <a:pt x="6589272" y="975616"/>
-                  </a:lnTo>
-                  <a:lnTo>
-                    <a:pt x="6660894" y="982034"/>
-                  </a:lnTo>
-                  <a:lnTo>
-                    <a:pt x="6732517" y="988388"/>
-                  </a:lnTo>
-                  <a:lnTo>
-                    <a:pt x="6804139" y="994678"/>
-                  </a:lnTo>
-                  <a:lnTo>
-                    <a:pt x="6875762" y="1000905"/>
-                  </a:lnTo>
-                  <a:lnTo>
-                    <a:pt x="6947385" y="1007070"/>
-                  </a:lnTo>
-                  <a:lnTo>
-                    <a:pt x="7019007" y="1013173"/>
-                  </a:lnTo>
-                  <a:lnTo>
-                    <a:pt x="7090630" y="1019216"/>
+                    <a:pt x="71622" y="16457"/>
+                  </a:lnTo>
+                  <a:lnTo>
+                    <a:pt x="143245" y="32748"/>
+                  </a:lnTo>
+                  <a:lnTo>
+                    <a:pt x="214867" y="48875"/>
+                  </a:lnTo>
+                  <a:lnTo>
+                    <a:pt x="286490" y="64839"/>
+                  </a:lnTo>
+                  <a:lnTo>
+                    <a:pt x="358112" y="80641"/>
+                  </a:lnTo>
+                  <a:lnTo>
+                    <a:pt x="429735" y="96284"/>
+                  </a:lnTo>
+                  <a:lnTo>
+                    <a:pt x="501357" y="111769"/>
+                  </a:lnTo>
+                  <a:lnTo>
+                    <a:pt x="572980" y="127098"/>
+                  </a:lnTo>
+                  <a:lnTo>
+                    <a:pt x="644602" y="142272"/>
+                  </a:lnTo>
+                  <a:lnTo>
+                    <a:pt x="716225" y="157292"/>
+                  </a:lnTo>
+                  <a:lnTo>
+                    <a:pt x="787847" y="172161"/>
+                  </a:lnTo>
+                  <a:lnTo>
+                    <a:pt x="859470" y="186880"/>
+                  </a:lnTo>
+                  <a:lnTo>
+                    <a:pt x="931092" y="201450"/>
+                  </a:lnTo>
+                  <a:lnTo>
+                    <a:pt x="1002715" y="215873"/>
+                  </a:lnTo>
+                  <a:lnTo>
+                    <a:pt x="1074337" y="230151"/>
+                  </a:lnTo>
+                  <a:lnTo>
+                    <a:pt x="1145960" y="244284"/>
+                  </a:lnTo>
+                  <a:lnTo>
+                    <a:pt x="1217582" y="258274"/>
+                  </a:lnTo>
+                  <a:lnTo>
+                    <a:pt x="1289205" y="272124"/>
+                  </a:lnTo>
+                  <a:lnTo>
+                    <a:pt x="1360827" y="285833"/>
+                  </a:lnTo>
+                  <a:lnTo>
+                    <a:pt x="1432450" y="299404"/>
+                  </a:lnTo>
+                  <a:lnTo>
+                    <a:pt x="1504073" y="312838"/>
+                  </a:lnTo>
+                  <a:lnTo>
+                    <a:pt x="1575695" y="326136"/>
+                  </a:lnTo>
+                  <a:lnTo>
+                    <a:pt x="1647318" y="339300"/>
+                  </a:lnTo>
+                  <a:lnTo>
+                    <a:pt x="1718940" y="352331"/>
+                  </a:lnTo>
+                  <a:lnTo>
+                    <a:pt x="1790563" y="365230"/>
+                  </a:lnTo>
+                  <a:lnTo>
+                    <a:pt x="1862185" y="377999"/>
+                  </a:lnTo>
+                  <a:lnTo>
+                    <a:pt x="1933808" y="390639"/>
+                  </a:lnTo>
+                  <a:lnTo>
+                    <a:pt x="2005430" y="403152"/>
+                  </a:lnTo>
+                  <a:lnTo>
+                    <a:pt x="2077053" y="415538"/>
+                  </a:lnTo>
+                  <a:lnTo>
+                    <a:pt x="2148675" y="427799"/>
+                  </a:lnTo>
+                  <a:lnTo>
+                    <a:pt x="2220298" y="439936"/>
+                  </a:lnTo>
+                  <a:lnTo>
+                    <a:pt x="2291920" y="451951"/>
+                  </a:lnTo>
+                  <a:lnTo>
+                    <a:pt x="2363543" y="463844"/>
+                  </a:lnTo>
+                  <a:lnTo>
+                    <a:pt x="2435165" y="475617"/>
+                  </a:lnTo>
+                  <a:lnTo>
+                    <a:pt x="2506788" y="487272"/>
+                  </a:lnTo>
+                  <a:lnTo>
+                    <a:pt x="2578410" y="498808"/>
+                  </a:lnTo>
+                  <a:lnTo>
+                    <a:pt x="2650033" y="510229"/>
+                  </a:lnTo>
+                  <a:lnTo>
+                    <a:pt x="2721655" y="521533"/>
+                  </a:lnTo>
+                  <a:lnTo>
+                    <a:pt x="2793278" y="532724"/>
+                  </a:lnTo>
+                  <a:lnTo>
+                    <a:pt x="2864901" y="543802"/>
+                  </a:lnTo>
+                  <a:lnTo>
+                    <a:pt x="2936523" y="554768"/>
+                  </a:lnTo>
+                  <a:lnTo>
+                    <a:pt x="3008146" y="565623"/>
+                  </a:lnTo>
+                  <a:lnTo>
+                    <a:pt x="3079768" y="576368"/>
+                  </a:lnTo>
+                  <a:lnTo>
+                    <a:pt x="3151391" y="587005"/>
+                  </a:lnTo>
+                  <a:lnTo>
+                    <a:pt x="3223013" y="597534"/>
+                  </a:lnTo>
+                  <a:lnTo>
+                    <a:pt x="3294636" y="607958"/>
+                  </a:lnTo>
+                  <a:lnTo>
+                    <a:pt x="3366258" y="618276"/>
+                  </a:lnTo>
+                  <a:lnTo>
+                    <a:pt x="3437881" y="628489"/>
+                  </a:lnTo>
+                  <a:lnTo>
+                    <a:pt x="3509503" y="638600"/>
+                  </a:lnTo>
+                  <a:lnTo>
+                    <a:pt x="3581126" y="648608"/>
+                  </a:lnTo>
+                  <a:lnTo>
+                    <a:pt x="3652748" y="658516"/>
+                  </a:lnTo>
+                  <a:lnTo>
+                    <a:pt x="3724371" y="668323"/>
+                  </a:lnTo>
+                  <a:lnTo>
+                    <a:pt x="3795993" y="678031"/>
+                  </a:lnTo>
+                  <a:lnTo>
+                    <a:pt x="3867616" y="687642"/>
+                  </a:lnTo>
+                  <a:lnTo>
+                    <a:pt x="3939238" y="697155"/>
+                  </a:lnTo>
+                  <a:lnTo>
+                    <a:pt x="4010861" y="706572"/>
+                  </a:lnTo>
+                  <a:lnTo>
+                    <a:pt x="4082483" y="715894"/>
+                  </a:lnTo>
+                  <a:lnTo>
+                    <a:pt x="4154106" y="725122"/>
+                  </a:lnTo>
+                  <a:lnTo>
+                    <a:pt x="4225729" y="734257"/>
+                  </a:lnTo>
+                  <a:lnTo>
+                    <a:pt x="4297351" y="743299"/>
+                  </a:lnTo>
+                  <a:lnTo>
+                    <a:pt x="4368974" y="752250"/>
+                  </a:lnTo>
+                  <a:lnTo>
+                    <a:pt x="4440596" y="761111"/>
+                  </a:lnTo>
+                  <a:lnTo>
+                    <a:pt x="4512219" y="769882"/>
+                  </a:lnTo>
+                  <a:lnTo>
+                    <a:pt x="4583841" y="778565"/>
+                  </a:lnTo>
+                  <a:lnTo>
+                    <a:pt x="4655464" y="787160"/>
+                  </a:lnTo>
+                  <a:lnTo>
+                    <a:pt x="4727086" y="795668"/>
+                  </a:lnTo>
+                  <a:lnTo>
+                    <a:pt x="4798709" y="804091"/>
+                  </a:lnTo>
+                  <a:lnTo>
+                    <a:pt x="4870331" y="812428"/>
+                  </a:lnTo>
+                  <a:lnTo>
+                    <a:pt x="4941954" y="820681"/>
+                  </a:lnTo>
+                  <a:lnTo>
+                    <a:pt x="5013576" y="828851"/>
+                  </a:lnTo>
+                  <a:lnTo>
+                    <a:pt x="5085199" y="836938"/>
+                  </a:lnTo>
+                  <a:lnTo>
+                    <a:pt x="5156821" y="844943"/>
+                  </a:lnTo>
+                  <a:lnTo>
+                    <a:pt x="5228444" y="852868"/>
+                  </a:lnTo>
+                  <a:lnTo>
+                    <a:pt x="5300066" y="860713"/>
+                  </a:lnTo>
+                  <a:lnTo>
+                    <a:pt x="5371689" y="868478"/>
+                  </a:lnTo>
+                  <a:lnTo>
+                    <a:pt x="5443311" y="876165"/>
+                  </a:lnTo>
+                  <a:lnTo>
+                    <a:pt x="5514934" y="883775"/>
+                  </a:lnTo>
+                  <a:lnTo>
+                    <a:pt x="5586557" y="891307"/>
+                  </a:lnTo>
+                  <a:lnTo>
+                    <a:pt x="5658179" y="898764"/>
+                  </a:lnTo>
+                  <a:lnTo>
+                    <a:pt x="5729802" y="906145"/>
+                  </a:lnTo>
+                  <a:lnTo>
+                    <a:pt x="5801424" y="913452"/>
+                  </a:lnTo>
+                  <a:lnTo>
+                    <a:pt x="5873047" y="920684"/>
+                  </a:lnTo>
+                  <a:lnTo>
+                    <a:pt x="5944669" y="927844"/>
+                  </a:lnTo>
+                  <a:lnTo>
+                    <a:pt x="6016292" y="934932"/>
+                  </a:lnTo>
+                  <a:lnTo>
+                    <a:pt x="6087914" y="941948"/>
+                  </a:lnTo>
+                  <a:lnTo>
+                    <a:pt x="6159537" y="948893"/>
+                  </a:lnTo>
+                  <a:lnTo>
+                    <a:pt x="6231159" y="955768"/>
+                  </a:lnTo>
+                  <a:lnTo>
+                    <a:pt x="6302782" y="962573"/>
+                  </a:lnTo>
+                  <a:lnTo>
+                    <a:pt x="6374404" y="969310"/>
+                  </a:lnTo>
+                  <a:lnTo>
+                    <a:pt x="6446027" y="975979"/>
+                  </a:lnTo>
+                  <a:lnTo>
+                    <a:pt x="6517649" y="982580"/>
+                  </a:lnTo>
+                  <a:lnTo>
+                    <a:pt x="6589272" y="989115"/>
+                  </a:lnTo>
+                  <a:lnTo>
+                    <a:pt x="6660894" y="995584"/>
+                  </a:lnTo>
+                  <a:lnTo>
+                    <a:pt x="6732517" y="1001987"/>
+                  </a:lnTo>
+                  <a:lnTo>
+                    <a:pt x="6804139" y="1008326"/>
+                  </a:lnTo>
+                  <a:lnTo>
+                    <a:pt x="6875762" y="1014601"/>
+                  </a:lnTo>
+                  <a:lnTo>
+                    <a:pt x="6947385" y="1020812"/>
+                  </a:lnTo>
+                  <a:lnTo>
+                    <a:pt x="7019007" y="1026961"/>
+                  </a:lnTo>
+                  <a:lnTo>
+                    <a:pt x="7090630" y="1033048"/>
                   </a:lnTo>
                 </a:path>
               </a:pathLst>
@@ -5371,7 +5371,7 @@
                   <a:latin typeface="Helvetica"/>
                   <a:cs typeface="Helvetica"/>
                 </a:rPr>
-                <a:t>subHR per 10 mL/min decline: 1.13 (1.03-1.24), p_Bonf = 0.053 (n = 6)  |  per IQR decline (Δ = 23.3): 1.33 (1.07-1.64)  |  IQR: [-12.8, 10.5]</a:t>
+                <a:t>subHR per 10 mL/min decline: 1.13 (1.03-1.24), p_Bonf = 0.049 (n = 6)  |  per IQR decline (Δ = 23.3): 1.33 (1.08-1.65)  |  IQR: [-12.8, 10.5]</a:t>
               </a:r>
             </a:p>
           </p:txBody>
